--- a/en/slides/23-Computer_Architecture-Verm1_On_The_Cartridge_Store-Code.pptx
+++ b/en/slides/23-Computer_Architecture-Verm1_On_The_Cartridge_Store-Code.pptx
@@ -123,26 +123,42 @@
   <p:extLst>
     <p:ext uri="{521415D9-36F7-43E2-AB2F-B90AF26B5E84}">
       <p14:sectionLst xmlns:p14="http://schemas.microsoft.com/office/powerpoint/2010/main">
-        <p14:section name="Opening" id="{063c8b01-0c36-c2fa-0fe6-aad0c3c51dea}">
+        <p14:section name="Opening" id="{fad7cf6b-c0e4-a518-dcb6-91901485237a}">
           <p14:sldIdLst>
             <p14:sldId id="256"/>
             <p14:sldId id="257"/>
           </p14:sldIdLst>
         </p14:section>
-        <p14:section name="The listings" id="{1d0ffe85-32f0-94f6-813a-202978ed4362}">
+        <p14:section name="Step 1: one source, two cartridges" id="{364c188b-e7f6-4cd9-a005-2b1dde375ae1}">
           <p14:sldIdLst>
             <p14:sldId id="258"/>
             <p14:sldId id="259"/>
+          </p14:sldIdLst>
+        </p14:section>
+        <p14:section name="Step 2: an identity" id="{a61aac64-b02c-6d6f-c1ee-2d0e4f4258a7}">
+          <p14:sldIdLst>
             <p14:sldId id="260"/>
             <p14:sldId id="261"/>
+          </p14:sldIdLst>
+        </p14:section>
+        <p14:section name="Step 3: the cartridge carries its papers" id="{b4309bc9-ed3e-00cb-3c3b-ed9696e4e911}">
+          <p14:sldIdLst>
             <p14:sldId id="262"/>
             <p14:sldId id="263"/>
+          </p14:sldIdLst>
+        </p14:section>
+        <p14:section name="Step 4: the bundle" id="{981f87c5-b836-93e2-5a42-57433ad7dc7b}">
+          <p14:sldIdLst>
             <p14:sldId id="264"/>
             <p14:sldId id="265"/>
+          </p14:sldIdLst>
+        </p14:section>
+        <p14:section name="Step 5: publication" id="{b06a55b8-27e3-9179-7e37-789343d8a46e}">
+          <p14:sldIdLst>
             <p14:sldId id="266"/>
           </p14:sldIdLst>
         </p14:section>
-        <p14:section name="Run it and test it" id="{1b75b99b-3a7b-02a4-db2e-d1d24a13996a}">
+        <p14:section name="Run it and test it" id="{a7414621-2326-4dbb-a3b2-2c3f1923762e}">
           <p14:sldIdLst>
             <p14:sldId id="267"/>
             <p14:sldId id="268"/>
@@ -151,7 +167,7 @@
             <p14:sldId id="271"/>
           </p14:sldIdLst>
         </p14:section>
-        <p14:section name="Exercises" id="{19794a80-dcb6-2b51-ca89-3782b8006639}">
+        <p14:section name="Exercises" id="{d622dbe1-bafa-b4b5-67aa-abead8e00b09}">
           <p14:sldIdLst>
             <p14:sldId id="272"/>
           </p14:sldIdLst>
@@ -2997,7 +3013,63 @@
       </p:sp>
       <p:sp>
         <p:nvSpPr>
-          <p:cNvPr id="12" name="Shape 10"/>
+          <p:cNvPr id="12" name="Text 10"/>
+          <p:cNvSpPr txBox="1"/>
+          <p:nvPr/>
+        </p:nvSpPr>
+        <p:spPr>
+          <a:xfrm>
+            <a:off x="4693615" y="566928"/>
+            <a:ext cx="6949440" cy="640080"/>
+          </a:xfrm>
+          <a:prstGeom prst="rect">
+            <a:avLst/>
+          </a:prstGeom>
+          <a:noFill/>
+          <a:ln/>
+        </p:spPr>
+        <p:txBody>
+          <a:bodyPr wrap="square" lIns="0" tIns="0" rIns="0" bIns="0" rtlCol="0" anchor="t"/>
+          <a:lstStyle/>
+          <a:p>
+            <a:pPr algn="r" indent="0" marL="0">
+              <a:buNone/>
+            </a:pPr>
+            <a:r>
+              <a:rPr lang="en-US" sz="1300" dirty="0">
+                <a:solidFill>
+                  <a:srgbClr val="CFE3EA"/>
+                </a:solidFill>
+                <a:latin typeface="Calibri" pitchFamily="34" charset="0"/>
+                <a:ea typeface="Calibri" pitchFamily="34" charset="-122"/>
+                <a:cs typeface="Calibri" pitchFamily="34" charset="-120"/>
+              </a:rPr>
+              <a:t>Code deck. The concepts, the figures and the questions are in the lecture deck:</a:t>
+            </a:r>
+            <a:endParaRPr lang="en-US" sz="1300" dirty="0"/>
+          </a:p>
+          <a:p>
+            <a:pPr algn="r" indent="0" marL="0">
+              <a:buNone/>
+            </a:pPr>
+            <a:r>
+              <a:rPr lang="en-US" sz="1300" dirty="0">
+                <a:solidFill>
+                  <a:srgbClr val="CFE3EA"/>
+                </a:solidFill>
+                <a:latin typeface="Calibri" pitchFamily="34" charset="0"/>
+                <a:ea typeface="Calibri" pitchFamily="34" charset="-122"/>
+                <a:cs typeface="Calibri" pitchFamily="34" charset="-120"/>
+              </a:rPr>
+              <a:t>23-Computer_Architecture-Verm1_On_The_Cartridge_Store.pptx</a:t>
+            </a:r>
+            <a:endParaRPr lang="en-US" sz="1300" dirty="0"/>
+          </a:p>
+        </p:txBody>
+      </p:sp>
+      <p:sp>
+        <p:nvSpPr>
+          <p:cNvPr id="13" name="Shape 11"/>
           <p:cNvSpPr/>
           <p:nvPr/>
         </p:nvSpPr>
@@ -3024,7 +3096,7 @@
       </p:sp>
       <p:pic>
         <p:nvPicPr>
-          <p:cNvPr id="13" name="Image 0" descr="/Users/raffaelemontella/devel/riscv-prg32/computer-architecture-with-prg32/tools/assets/prg32qt_store.png">    </p:cNvPr>
+          <p:cNvPr id="14" name="Image 0" descr="/Users/raffaelemontella/devel/riscv-prg32/computer-architecture-with-prg32/tools/assets/prg32qt_store.png">    </p:cNvPr>
           <p:cNvPicPr>
             <a:picLocks noChangeAspect="1"/>
           </p:cNvPicPr>

--- a/en/slides/23-Computer_Architecture-Verm1_On_The_Cartridge_Store-Code.pptx
+++ b/en/slides/23-Computer_Architecture-Verm1_On_The_Cartridge_Store-Code.pptx
@@ -123,42 +123,42 @@
   <p:extLst>
     <p:ext uri="{521415D9-36F7-43E2-AB2F-B90AF26B5E84}">
       <p14:sectionLst xmlns:p14="http://schemas.microsoft.com/office/powerpoint/2010/main">
-        <p14:section name="Opening" id="{fad7cf6b-c0e4-a518-dcb6-91901485237a}">
+        <p14:section name="Opening" id="{aa134596-b1e8-24cb-f5f7-5ba4268f422e}">
           <p14:sldIdLst>
             <p14:sldId id="256"/>
             <p14:sldId id="257"/>
           </p14:sldIdLst>
         </p14:section>
-        <p14:section name="Step 1: one source, two cartridges" id="{364c188b-e7f6-4cd9-a005-2b1dde375ae1}">
+        <p14:section name="Step 1: one source, two cartridges" id="{7f709195-6d8b-983f-b7ec-ed31fc7207ff}">
           <p14:sldIdLst>
             <p14:sldId id="258"/>
             <p14:sldId id="259"/>
           </p14:sldIdLst>
         </p14:section>
-        <p14:section name="Step 2: an identity" id="{a61aac64-b02c-6d6f-c1ee-2d0e4f4258a7}">
+        <p14:section name="Step 2: an identity" id="{13a2b3d3-2b99-a3a7-1d00-eadc68d7fd1e}">
           <p14:sldIdLst>
             <p14:sldId id="260"/>
             <p14:sldId id="261"/>
           </p14:sldIdLst>
         </p14:section>
-        <p14:section name="Step 3: the cartridge carries its papers" id="{b4309bc9-ed3e-00cb-3c3b-ed9696e4e911}">
+        <p14:section name="Step 3: the cartridge carries its papers" id="{11de7cff-d375-d6d4-099d-027aeb44401f}">
           <p14:sldIdLst>
             <p14:sldId id="262"/>
             <p14:sldId id="263"/>
           </p14:sldIdLst>
         </p14:section>
-        <p14:section name="Step 4: the bundle" id="{981f87c5-b836-93e2-5a42-57433ad7dc7b}">
+        <p14:section name="Step 4: the bundle" id="{e6a81386-a3af-ca83-9f83-a3d8dc44b08f}">
           <p14:sldIdLst>
             <p14:sldId id="264"/>
             <p14:sldId id="265"/>
           </p14:sldIdLst>
         </p14:section>
-        <p14:section name="Step 5: publication" id="{b06a55b8-27e3-9179-7e37-789343d8a46e}">
+        <p14:section name="Step 5: publication" id="{fd2ad682-e3ab-6839-0839-db7b1562c0dc}">
           <p14:sldIdLst>
             <p14:sldId id="266"/>
           </p14:sldIdLst>
         </p14:section>
-        <p14:section name="Run it and test it" id="{a7414621-2326-4dbb-a3b2-2c3f1923762e}">
+        <p14:section name="Run it and test it" id="{790b593c-3b28-b817-b6ce-5f2a8b46b66a}">
           <p14:sldIdLst>
             <p14:sldId id="267"/>
             <p14:sldId id="268"/>
@@ -167,7 +167,7 @@
             <p14:sldId id="271"/>
           </p14:sldIdLst>
         </p14:section>
-        <p14:section name="Exercises" id="{d622dbe1-bafa-b4b5-67aa-abead8e00b09}">
+        <p14:section name="Exercises" id="{a7c3d9cf-4114-47f5-5e3a-658599f6f4e3}">
           <p14:sldIdLst>
             <p14:sldId id="272"/>
           </p14:sldIdLst>
@@ -576,7 +576,9 @@
           <a:p>
             <a:r>
               <a:rPr lang="en-US" dirty="0"/>
-              <a:t>This is the code deck of Lecture 23. The lecture deck holds the concepts; this one holds everything you type and run: the listings with their explanation, the complete program, what it shows, and the way to test it on each of the three hosts.</a:t>
+              <a:t>This is the code deck of Lecture 23. The lecture deck holds the concepts; this one holds everything you type and run: the listings with their explanation, the complete program, what it shows, and the way to test it on each of the three hosts.
+Learning status: UNDERSTAND NOW, by the end of this lecture you explain it, trace it and apply it on your own; USE NOW, you follow and use the recipe today; how it works inside is explained later, or is not part of the course; UNDERSTAND LATER, recognise the name and what it is for; a later lecture explains it. A slide without a badge is context: a story, an example, a question, an exercise.
+Learning status of this lecture. UNDERSTAND NOW: packaging and publishing; the portable cartridge. USE NOW: the PRG32 tools (used, not studied, in this course). UNDERSTAND LATER: nothing. A slide without a badge is context: a story, an example, a question, an exercise.</a:t>
             </a:r>
             <a:endParaRPr lang="en-US" dirty="0"/>
           </a:p>
@@ -754,6 +756,7 @@
             <a:r>
               <a:rPr lang="en-US" dirty="0"/>
               <a:t>Three actions. Sign in to the Store and create a token. Keep it in an environment variable of your shell. Then submit the bundle with store publish-bundle. The token is you: whoever has it publishes in your name. So it is a secret: it does not go in the source, in a file under version control, or in a screenshot. If you lose it or show it by mistake, revoke it and create a new one.
+UNDERSTAND NOW: packaging and publishing.
 For the lecturer: This is the only step that was not run for these slides: it needs a personal account. Do it live with a volunteer, with the volunteer's own token, and never project the token.</a:t>
             </a:r>
             <a:endParaRPr lang="en-US" dirty="0"/>
@@ -932,6 +935,7 @@
             <a:r>
               <a:rPr lang="en-US" dirty="0"/>
               <a:t>The quickest way: PRG32-QT on your own computer. Four steps, each with its command. PRG32-QT behaves like a board on port 8080, which is why the upload command says esp32c6. With debug mode enabled you can stop at any instruction and read registers and memory.
+USE NOW: the PRG32 tools (used, not studied, in this course).
 For the lecturer: Run by the tests: the cartridge of this slide is built with this command and executed on the headless runner of PRG32-QT. Without the toolchain: import the .prg32 file in PRG32-QT and choose Run Cartridge. Keys: arrows or WASD for the joystick, Z or J for A, X or K for B, Enter for Start, Escape to go back to Setup.</a:t>
             </a:r>
             <a:endParaRPr lang="en-US" dirty="0"/>
@@ -1021,6 +1025,7 @@
             <a:r>
               <a:rPr lang="en-US" dirty="0"/>
               <a:t>The same program on the emulator. QEMU runs the real firmware on an emulated chip, so the cartridge must be built for the architecture qemu. Stage the cartridge while QEMU is closed. The firmware opens on the Setup menu: choose Run Cartridge and the slot. Remember that the keyboard is read by the terminal, not by the window with the picture.
+USE NOW: the PRG32 tools (used, not studied, in this course).
 For the lecturer: Checked by the tests up to the staging: the cartridge is built for the architecture qemu and accepted into the flash image of the emulator. What the emulator then shows is not checked automatically: Espressif QEMU needs its window. Since October 2026 the firmware starts on Setup: choose Run Cartridge, then cart0.</a:t>
             </a:r>
             <a:endParaRPr lang="en-US" dirty="0"/>
@@ -1110,6 +1115,7 @@
             <a:r>
               <a:rPr lang="en-US" dirty="0"/>
               <a:t>The same program on the kit. The firmware is written once, through USB; after that cartridges travel over Wi-Fi. The upload command is the one used for PRG32-QT with the address of the board. This is the only host that the automatic tests do not run: try it, and report what you see.
+USE NOW: the PRG32 tools (used, not studied, in this course).
 For the lecturer: Not run by the tests: there is no board on the test machine. The cartridge for the architecture esp32c6 is built by the tests; the steps are those of the PRG32 documentation. If the serial port is not found pass it explicitly. To use the Wi-Fi of the classroom: python3 -m prg32 wifi set --ssid NAME --password PASSWORD --mode sta.</a:t>
             </a:r>
             <a:endParaRPr lang="en-US" dirty="0"/>
@@ -1199,6 +1205,7 @@
             <a:r>
               <a:rPr lang="en-US" dirty="0"/>
               <a:t>The five most common symptoms, what each means, and what to do. Read the message before changing anything: it nearly always names the cause.
+USE NOW: the PRG32 tools (used, not studied, in this course).
 For the lecturer: The first three rows cover most cases. When asking for help, paste the command and the whole message as text. docs/usage/troubleshooting.md of the PRG32 repository has the complete list.</a:t>
             </a:r>
             <a:endParaRPr lang="en-US" dirty="0"/>
@@ -1466,6 +1473,7 @@
             <a:r>
               <a:rPr lang="en-US" dirty="0"/>
               <a:t>The build command of every lecture, with one more option: --architecture names the target for which the file is produced, first esp32c6 and then qemu. The output files follow a naming rule: the name of the game, a hyphen, the architecture. The source is the same for both. Look at the size the builder reports: the whole finished game is about six kilobytes of code.
+UNDERSTAND NOW: the portable cartridge. USE NOW: the PRG32 tools (used, not studied, in this course).
 For the lecturer: The builder answers: built verm1-esp32c6.prg32 name=verm1 load=0x40800000, and code=6216 for the reference game. Six kilobytes: less than this slide as a picture.</a:t>
             </a:r>
             <a:endParaRPr lang="en-US" dirty="0"/>
@@ -1555,6 +1563,7 @@
             <a:r>
               <a:rPr lang="en-US" dirty="0"/>
               <a:t>cartridge summary prints what a cartridge file declares about itself. Look for one line: import_model must be abi-table. It means that the cartridge reaches the functions of the runtime through a table, and not through the fixed addresses of one particular firmware image. Such a cartridge is portable: it keeps working when the firmware is updated. The Store accepts portable cartridges. Repeat the check on the second file.
+UNDERSTAND NOW: the portable cartridge.
 For the lecturer: A non-portable cartridge is linked against the addresses of one firmware image and breaks at the next update. The table is the ABI of PRG32: prg32_gfx_rect and the others are entries of it. Repeat the check on the QEMU file.</a:t>
             </a:r>
             <a:endParaRPr lang="en-US" dirty="0"/>
@@ -1644,6 +1653,7 @@
             <a:r>
               <a:rPr lang="en-US" dirty="0"/>
               <a:t>The manifest is a JSON file that describes the game. Read the fields one by one. id is a name unique in the world. version is three numbers. title is what the player reads. summary is one line for the shelf and description a paragraph. Then authors, licence and tags. At the end, assets names the icon and architectures says which cartridge file serves which target. Create it with a text editor in the folder of your game.
+UNDERSTAND NOW: packaging and publishing.
 For the lecturer: Create the file in ~/verm1 with a text editor. The description is cut on the slide. The abi line says which version of the metadata format this is.</a:t>
             </a:r>
             <a:endParaRPr lang="en-US" dirty="0"/>
@@ -1733,6 +1743,7 @@
             <a:r>
               <a:rPr lang="en-US" dirty="0"/>
               <a:t>The colophon is the credits page of the cartridge; the word comes from printing, where it is the note at the end of a book that says who made it. It lists roles and names, the controls, that is what each input does for the player, and the acknowledgements, where the reference game you started from remains cited. Replace the placeholder name everywhere and set the date.
+UNDERSTAND NOW: packaging and publishing.
 For the lecturer: Colophon is the printers' word for the note at the end of a book that says who made it. Replace Your Name everywhere, and set the release date.</a:t>
             </a:r>
             <a:endParaRPr lang="en-US" dirty="0"/>
@@ -1822,6 +1833,7 @@
             <a:r>
               <a:rPr lang="en-US" dirty="0"/>
               <a:t>First prepare metadata.json: a copy of the manifest without the two entries assets and architectures, which concern the bundle and not the single cartridge. Then store attach-metadata writes metadata, icon and colophon inside the cartridge: once per file, each with its own architecture. The program is not touched; the information is appended after it. From now on a cartridge copied by hand still says what it is and who made it.
+UNDERSTAND NOW: the portable cartridge.
 For the lecturer: The tool answers: wrote verm1-esp32c6.prg32 legacy=6316 blocks=3. The three blocks are the metadata, the icon and the colophon, appended after the program; the program itself is untouched. Careful: giving the full manifest to --metadata makes the tool fail, because of the assets entry.</a:t>
             </a:r>
             <a:endParaRPr lang="en-US" dirty="0"/>
@@ -1911,6 +1923,7 @@
             <a:r>
               <a:rPr lang="en-US" dirty="0"/>
               <a:t>Never trust a write that you have not read back. store inspect-metadata prints what is inside the cartridge: check the id, the title, the version and the architecture, and that trailer_present is true. Then run the cartridge once more: it must work exactly as before. Reading back what was written is the habit of the whole course, from the memory view of the debugger to this command.
+UNDERSTAND NOW: the portable cartridge.
 For the lecturer: Output abridged. Reading back what was written is the habit of the whole course: the memory view of the debugger, and now this.</a:t>
             </a:r>
             <a:endParaRPr lang="en-US" dirty="0"/>
@@ -2000,6 +2013,7 @@
             <a:r>
               <a:rPr lang="en-US" dirty="0"/>
               <a:t>store pack-bundle reads the manifest, collects the files it names and produces a ZIP file whose name carries the version. If a file is missing or misnamed, the tool stops here, on your computer, and not later at the Store. Look at the listing it prints: the manifest, the icon and the two cartridges. Your whole game, for two machines, is about sixteen kilobytes.
+UNDERSTAND NOW: packaging and publishing.
 For the lecturer: Real output for the reference game, from tools/tests/verm1_store.py. The files must be in the same folder as the manifest.</a:t>
             </a:r>
             <a:endParaRPr lang="en-US" dirty="0"/>
@@ -3120,6 +3134,420 @@
       </p:pic>
       <p:sp>
         <p:nvSpPr>
+          <p:cNvPr id="15" name="Shape 12"/>
+          <p:cNvSpPr/>
+          <p:nvPr/>
+        </p:nvSpPr>
+        <p:spPr>
+          <a:xfrm>
+            <a:off x="9690303" y="91440"/>
+            <a:ext cx="1952752" cy="274320"/>
+          </a:xfrm>
+          <a:prstGeom prst="rect">
+            <a:avLst/>
+          </a:prstGeom>
+          <a:solidFill>
+            <a:srgbClr val="F3E8FF"/>
+          </a:solidFill>
+          <a:ln w="12700">
+            <a:solidFill>
+              <a:srgbClr val="7E22CE"/>
+            </a:solidFill>
+            <a:prstDash val="dash"/>
+          </a:ln>
+        </p:spPr>
+      </p:sp>
+      <p:sp>
+        <p:nvSpPr>
+          <p:cNvPr id="16" name="Shape 13"/>
+          <p:cNvSpPr/>
+          <p:nvPr/>
+        </p:nvSpPr>
+        <p:spPr>
+          <a:xfrm>
+            <a:off x="9717735" y="128016"/>
+            <a:ext cx="45720" cy="45720"/>
+          </a:xfrm>
+          <a:prstGeom prst="rect">
+            <a:avLst/>
+          </a:prstGeom>
+          <a:solidFill>
+            <a:srgbClr val="7E22CE"/>
+          </a:solidFill>
+          <a:ln w="12700">
+            <a:solidFill>
+              <a:srgbClr val="7E22CE"/>
+            </a:solidFill>
+            <a:prstDash val="solid"/>
+          </a:ln>
+        </p:spPr>
+      </p:sp>
+      <p:sp>
+        <p:nvSpPr>
+          <p:cNvPr id="17" name="Shape 14"/>
+          <p:cNvSpPr/>
+          <p:nvPr/>
+        </p:nvSpPr>
+        <p:spPr>
+          <a:xfrm>
+            <a:off x="9717735" y="205740"/>
+            <a:ext cx="45720" cy="45720"/>
+          </a:xfrm>
+          <a:prstGeom prst="rect">
+            <a:avLst/>
+          </a:prstGeom>
+          <a:solidFill>
+            <a:srgbClr val="7E22CE"/>
+          </a:solidFill>
+          <a:ln w="12700">
+            <a:solidFill>
+              <a:srgbClr val="7E22CE"/>
+            </a:solidFill>
+            <a:prstDash val="solid"/>
+          </a:ln>
+        </p:spPr>
+      </p:sp>
+      <p:sp>
+        <p:nvSpPr>
+          <p:cNvPr id="18" name="Shape 15"/>
+          <p:cNvSpPr/>
+          <p:nvPr/>
+        </p:nvSpPr>
+        <p:spPr>
+          <a:xfrm>
+            <a:off x="9717735" y="283464"/>
+            <a:ext cx="45720" cy="45720"/>
+          </a:xfrm>
+          <a:prstGeom prst="rect">
+            <a:avLst/>
+          </a:prstGeom>
+          <a:solidFill>
+            <a:srgbClr val="7E22CE"/>
+          </a:solidFill>
+          <a:ln w="12700">
+            <a:solidFill>
+              <a:srgbClr val="7E22CE"/>
+            </a:solidFill>
+            <a:prstDash val="solid"/>
+          </a:ln>
+        </p:spPr>
+      </p:sp>
+      <p:pic>
+        <p:nvPicPr>
+          <p:cNvPr id="19" name="Image 1" descr="preencoded.png">    </p:cNvPr>
+          <p:cNvPicPr>
+            <a:picLocks noChangeAspect="1"/>
+          </p:cNvPicPr>
+          <p:nvPr/>
+        </p:nvPicPr>
+        <p:blipFill>
+          <a:blip r:embed="rId2"/>
+          <a:stretch>
+            <a:fillRect/>
+          </a:stretch>
+        </p:blipFill>
+        <p:spPr>
+          <a:xfrm>
+            <a:off x="9818319" y="128016"/>
+            <a:ext cx="201168" cy="201168"/>
+          </a:xfrm>
+          <a:prstGeom prst="rect">
+            <a:avLst/>
+          </a:prstGeom>
+        </p:spPr>
+      </p:pic>
+      <p:sp>
+        <p:nvSpPr>
+          <p:cNvPr id="20" name="Text 16"/>
+          <p:cNvSpPr txBox="1"/>
+          <p:nvPr/>
+        </p:nvSpPr>
+        <p:spPr>
+          <a:xfrm>
+            <a:off x="10074351" y="91440"/>
+            <a:ext cx="1532128" cy="274320"/>
+          </a:xfrm>
+          <a:prstGeom prst="rect">
+            <a:avLst/>
+          </a:prstGeom>
+          <a:noFill/>
+          <a:ln/>
+        </p:spPr>
+        <p:txBody>
+          <a:bodyPr wrap="square" lIns="0" tIns="0" rIns="0" bIns="0" rtlCol="0" anchor="ctr"/>
+          <a:lstStyle/>
+          <a:p>
+            <a:pPr indent="0" marL="0">
+              <a:buNone/>
+            </a:pPr>
+            <a:r>
+              <a:rPr lang="en-US" sz="1100" b="1" dirty="0">
+                <a:solidFill>
+                  <a:srgbClr val="6B21A8"/>
+                </a:solidFill>
+                <a:latin typeface="Calibri" pitchFamily="34" charset="0"/>
+                <a:ea typeface="Calibri" pitchFamily="34" charset="-122"/>
+                <a:cs typeface="Calibri" pitchFamily="34" charset="-120"/>
+              </a:rPr>
+              <a:t>UNDERSTAND LATER</a:t>
+            </a:r>
+            <a:endParaRPr lang="en-US" sz="1100" dirty="0"/>
+          </a:p>
+        </p:txBody>
+      </p:sp>
+      <p:sp>
+        <p:nvSpPr>
+          <p:cNvPr id="21" name="Shape 17"/>
+          <p:cNvSpPr/>
+          <p:nvPr/>
+        </p:nvSpPr>
+        <p:spPr>
+          <a:xfrm>
+            <a:off x="8407349" y="91440"/>
+            <a:ext cx="1173226" cy="274320"/>
+          </a:xfrm>
+          <a:prstGeom prst="rect">
+            <a:avLst/>
+          </a:prstGeom>
+          <a:solidFill>
+            <a:srgbClr val="FEF3C7"/>
+          </a:solidFill>
+          <a:ln w="12700">
+            <a:solidFill>
+              <a:srgbClr val="B45309"/>
+            </a:solidFill>
+            <a:prstDash val="solid"/>
+          </a:ln>
+        </p:spPr>
+      </p:sp>
+      <p:sp>
+        <p:nvSpPr>
+          <p:cNvPr id="22" name="Shape 18"/>
+          <p:cNvSpPr/>
+          <p:nvPr/>
+        </p:nvSpPr>
+        <p:spPr>
+          <a:xfrm>
+            <a:off x="8407349" y="91440"/>
+            <a:ext cx="27432" cy="274320"/>
+          </a:xfrm>
+          <a:prstGeom prst="rect">
+            <a:avLst/>
+          </a:prstGeom>
+          <a:solidFill>
+            <a:srgbClr val="B45309"/>
+          </a:solidFill>
+          <a:ln w="12700">
+            <a:solidFill>
+              <a:srgbClr val="B45309"/>
+            </a:solidFill>
+            <a:prstDash val="solid"/>
+          </a:ln>
+        </p:spPr>
+      </p:sp>
+      <p:sp>
+        <p:nvSpPr>
+          <p:cNvPr id="23" name="Shape 19"/>
+          <p:cNvSpPr/>
+          <p:nvPr/>
+        </p:nvSpPr>
+        <p:spPr>
+          <a:xfrm>
+            <a:off x="8462213" y="91440"/>
+            <a:ext cx="27432" cy="274320"/>
+          </a:xfrm>
+          <a:prstGeom prst="rect">
+            <a:avLst/>
+          </a:prstGeom>
+          <a:solidFill>
+            <a:srgbClr val="B45309"/>
+          </a:solidFill>
+          <a:ln w="12700">
+            <a:solidFill>
+              <a:srgbClr val="B45309"/>
+            </a:solidFill>
+            <a:prstDash val="solid"/>
+          </a:ln>
+        </p:spPr>
+      </p:sp>
+      <p:pic>
+        <p:nvPicPr>
+          <p:cNvPr id="24" name="Image 2" descr="preencoded.png">    </p:cNvPr>
+          <p:cNvPicPr>
+            <a:picLocks noChangeAspect="1"/>
+          </p:cNvPicPr>
+          <p:nvPr/>
+        </p:nvPicPr>
+        <p:blipFill>
+          <a:blip r:embed="rId3"/>
+          <a:stretch>
+            <a:fillRect/>
+          </a:stretch>
+        </p:blipFill>
+        <p:spPr>
+          <a:xfrm>
+            <a:off x="8535365" y="128016"/>
+            <a:ext cx="201168" cy="201168"/>
+          </a:xfrm>
+          <a:prstGeom prst="rect">
+            <a:avLst/>
+          </a:prstGeom>
+        </p:spPr>
+      </p:pic>
+      <p:sp>
+        <p:nvSpPr>
+          <p:cNvPr id="25" name="Text 20"/>
+          <p:cNvSpPr txBox="1"/>
+          <p:nvPr/>
+        </p:nvSpPr>
+        <p:spPr>
+          <a:xfrm>
+            <a:off x="8791397" y="91440"/>
+            <a:ext cx="752602" cy="274320"/>
+          </a:xfrm>
+          <a:prstGeom prst="rect">
+            <a:avLst/>
+          </a:prstGeom>
+          <a:noFill/>
+          <a:ln/>
+        </p:spPr>
+        <p:txBody>
+          <a:bodyPr wrap="square" lIns="0" tIns="0" rIns="0" bIns="0" rtlCol="0" anchor="ctr"/>
+          <a:lstStyle/>
+          <a:p>
+            <a:pPr indent="0" marL="0">
+              <a:buNone/>
+            </a:pPr>
+            <a:r>
+              <a:rPr lang="en-US" sz="1100" b="1" dirty="0">
+                <a:solidFill>
+                  <a:srgbClr val="92400E"/>
+                </a:solidFill>
+                <a:latin typeface="Calibri" pitchFamily="34" charset="0"/>
+                <a:ea typeface="Calibri" pitchFamily="34" charset="-122"/>
+                <a:cs typeface="Calibri" pitchFamily="34" charset="-120"/>
+              </a:rPr>
+              <a:t>USE NOW</a:t>
+            </a:r>
+            <a:endParaRPr lang="en-US" sz="1100" dirty="0"/>
+          </a:p>
+        </p:txBody>
+      </p:sp>
+      <p:sp>
+        <p:nvSpPr>
+          <p:cNvPr id="26" name="Shape 21"/>
+          <p:cNvSpPr/>
+          <p:nvPr/>
+        </p:nvSpPr>
+        <p:spPr>
+          <a:xfrm>
+            <a:off x="6518097" y="91440"/>
+            <a:ext cx="1779524" cy="274320"/>
+          </a:xfrm>
+          <a:prstGeom prst="rect">
+            <a:avLst/>
+          </a:prstGeom>
+          <a:solidFill>
+            <a:srgbClr val="E0F2FE"/>
+          </a:solidFill>
+          <a:ln w="12700">
+            <a:solidFill>
+              <a:srgbClr val="0369A1"/>
+            </a:solidFill>
+            <a:prstDash val="solid"/>
+          </a:ln>
+        </p:spPr>
+      </p:sp>
+      <p:sp>
+        <p:nvSpPr>
+          <p:cNvPr id="27" name="Shape 22"/>
+          <p:cNvSpPr/>
+          <p:nvPr/>
+        </p:nvSpPr>
+        <p:spPr>
+          <a:xfrm>
+            <a:off x="6518097" y="91440"/>
+            <a:ext cx="73152" cy="274320"/>
+          </a:xfrm>
+          <a:prstGeom prst="rect">
+            <a:avLst/>
+          </a:prstGeom>
+          <a:solidFill>
+            <a:srgbClr val="0369A1"/>
+          </a:solidFill>
+          <a:ln w="12700">
+            <a:solidFill>
+              <a:srgbClr val="0369A1"/>
+            </a:solidFill>
+            <a:prstDash val="solid"/>
+          </a:ln>
+        </p:spPr>
+      </p:sp>
+      <p:pic>
+        <p:nvPicPr>
+          <p:cNvPr id="28" name="Image 3" descr="preencoded.png">    </p:cNvPr>
+          <p:cNvPicPr>
+            <a:picLocks noChangeAspect="1"/>
+          </p:cNvPicPr>
+          <p:nvPr/>
+        </p:nvPicPr>
+        <p:blipFill>
+          <a:blip r:embed="rId4"/>
+          <a:stretch>
+            <a:fillRect/>
+          </a:stretch>
+        </p:blipFill>
+        <p:spPr>
+          <a:xfrm>
+            <a:off x="6646113" y="128016"/>
+            <a:ext cx="201168" cy="201168"/>
+          </a:xfrm>
+          <a:prstGeom prst="rect">
+            <a:avLst/>
+          </a:prstGeom>
+        </p:spPr>
+      </p:pic>
+      <p:sp>
+        <p:nvSpPr>
+          <p:cNvPr id="29" name="Text 23"/>
+          <p:cNvSpPr txBox="1"/>
+          <p:nvPr/>
+        </p:nvSpPr>
+        <p:spPr>
+          <a:xfrm>
+            <a:off x="6902145" y="91440"/>
+            <a:ext cx="1358900" cy="274320"/>
+          </a:xfrm>
+          <a:prstGeom prst="rect">
+            <a:avLst/>
+          </a:prstGeom>
+          <a:noFill/>
+          <a:ln/>
+        </p:spPr>
+        <p:txBody>
+          <a:bodyPr wrap="square" lIns="0" tIns="0" rIns="0" bIns="0" rtlCol="0" anchor="ctr"/>
+          <a:lstStyle/>
+          <a:p>
+            <a:pPr indent="0" marL="0">
+              <a:buNone/>
+            </a:pPr>
+            <a:r>
+              <a:rPr lang="en-US" sz="1100" b="1" dirty="0">
+                <a:solidFill>
+                  <a:srgbClr val="075985"/>
+                </a:solidFill>
+                <a:latin typeface="Calibri" pitchFamily="34" charset="0"/>
+                <a:ea typeface="Calibri" pitchFamily="34" charset="-122"/>
+                <a:cs typeface="Calibri" pitchFamily="34" charset="-120"/>
+              </a:rPr>
+              <a:t>UNDERSTAND NOW</a:t>
+            </a:r>
+            <a:endParaRPr lang="en-US" sz="1100" dirty="0"/>
+          </a:p>
+        </p:txBody>
+      </p:sp>
+      <p:sp>
+        <p:nvSpPr>
           <p:cNvPr id="25" name="Slide Number Placeholder 0"/>
           <p:cNvSpPr>
             <a:spLocks noGrp="1"/>
@@ -4582,6 +5010,133 @@
       </p:sp>
       <p:sp>
         <p:nvSpPr>
+          <p:cNvPr id="17" name="Shape 15"/>
+          <p:cNvSpPr/>
+          <p:nvPr/>
+        </p:nvSpPr>
+        <p:spPr>
+          <a:xfrm>
+            <a:off x="8090738" y="91440"/>
+            <a:ext cx="3552317" cy="274320"/>
+          </a:xfrm>
+          <a:prstGeom prst="rect">
+            <a:avLst/>
+          </a:prstGeom>
+          <a:solidFill>
+            <a:srgbClr val="E0F2FE"/>
+          </a:solidFill>
+          <a:ln w="12700">
+            <a:solidFill>
+              <a:srgbClr val="0369A1"/>
+            </a:solidFill>
+            <a:prstDash val="solid"/>
+          </a:ln>
+        </p:spPr>
+      </p:sp>
+      <p:sp>
+        <p:nvSpPr>
+          <p:cNvPr id="18" name="Shape 16"/>
+          <p:cNvSpPr/>
+          <p:nvPr/>
+        </p:nvSpPr>
+        <p:spPr>
+          <a:xfrm>
+            <a:off x="8090738" y="91440"/>
+            <a:ext cx="73152" cy="274320"/>
+          </a:xfrm>
+          <a:prstGeom prst="rect">
+            <a:avLst/>
+          </a:prstGeom>
+          <a:solidFill>
+            <a:srgbClr val="0369A1"/>
+          </a:solidFill>
+          <a:ln w="12700">
+            <a:solidFill>
+              <a:srgbClr val="0369A1"/>
+            </a:solidFill>
+            <a:prstDash val="solid"/>
+          </a:ln>
+        </p:spPr>
+      </p:sp>
+      <p:pic>
+        <p:nvPicPr>
+          <p:cNvPr id="19" name="Image 0" descr="preencoded.png">    </p:cNvPr>
+          <p:cNvPicPr>
+            <a:picLocks noChangeAspect="1"/>
+          </p:cNvPicPr>
+          <p:nvPr/>
+        </p:nvPicPr>
+        <p:blipFill>
+          <a:blip r:embed="rId1"/>
+          <a:stretch>
+            <a:fillRect/>
+          </a:stretch>
+        </p:blipFill>
+        <p:spPr>
+          <a:xfrm>
+            <a:off x="8218754" y="128016"/>
+            <a:ext cx="201168" cy="201168"/>
+          </a:xfrm>
+          <a:prstGeom prst="rect">
+            <a:avLst/>
+          </a:prstGeom>
+        </p:spPr>
+      </p:pic>
+      <p:sp>
+        <p:nvSpPr>
+          <p:cNvPr id="20" name="Text 17"/>
+          <p:cNvSpPr txBox="1"/>
+          <p:nvPr/>
+        </p:nvSpPr>
+        <p:spPr>
+          <a:xfrm>
+            <a:off x="8474786" y="91440"/>
+            <a:ext cx="3131693" cy="274320"/>
+          </a:xfrm>
+          <a:prstGeom prst="rect">
+            <a:avLst/>
+          </a:prstGeom>
+          <a:noFill/>
+          <a:ln/>
+        </p:spPr>
+        <p:txBody>
+          <a:bodyPr wrap="square" lIns="0" tIns="0" rIns="0" bIns="0" rtlCol="0" anchor="ctr"/>
+          <a:lstStyle/>
+          <a:p>
+            <a:pPr indent="0" marL="0">
+              <a:buNone/>
+            </a:pPr>
+            <a:r>
+              <a:rPr lang="en-US" sz="1100" b="1" dirty="0">
+                <a:solidFill>
+                  <a:srgbClr val="075985"/>
+                </a:solidFill>
+                <a:latin typeface="Calibri" pitchFamily="34" charset="0"/>
+                <a:ea typeface="Calibri" pitchFamily="34" charset="-122"/>
+                <a:cs typeface="Calibri" pitchFamily="34" charset="-120"/>
+              </a:rPr>
+              <a:t>UNDERSTAND NOW</a:t>
+            </a:r>
+            <a:pPr indent="0" marL="0">
+              <a:buNone/>
+            </a:pPr>
+            <a:r>
+              <a:rPr lang="en-US" sz="1100" dirty="0">
+                <a:solidFill>
+                  <a:srgbClr val="075985"/>
+                </a:solidFill>
+                <a:latin typeface="Calibri" pitchFamily="34" charset="0"/>
+                <a:ea typeface="Calibri" pitchFamily="34" charset="-122"/>
+                <a:cs typeface="Calibri" pitchFamily="34" charset="-120"/>
+              </a:rPr>
+              <a:t> · packaging and publishing</a:t>
+            </a:r>
+            <a:endParaRPr lang="en-US" sz="1100" dirty="0"/>
+          </a:p>
+        </p:txBody>
+      </p:sp>
+      <p:sp>
+        <p:nvSpPr>
           <p:cNvPr id="25" name="Slide Number Placeholder 0"/>
           <p:cNvSpPr>
             <a:spLocks noGrp="1"/>
@@ -5735,6 +6290,158 @@
       </p:sp>
       <p:sp>
         <p:nvSpPr>
+          <p:cNvPr id="17" name="Shape 15"/>
+          <p:cNvSpPr/>
+          <p:nvPr/>
+        </p:nvSpPr>
+        <p:spPr>
+          <a:xfrm>
+            <a:off x="9287967" y="91440"/>
+            <a:ext cx="2355088" cy="274320"/>
+          </a:xfrm>
+          <a:prstGeom prst="rect">
+            <a:avLst/>
+          </a:prstGeom>
+          <a:solidFill>
+            <a:srgbClr val="FEF3C7"/>
+          </a:solidFill>
+          <a:ln w="12700">
+            <a:solidFill>
+              <a:srgbClr val="B45309"/>
+            </a:solidFill>
+            <a:prstDash val="solid"/>
+          </a:ln>
+        </p:spPr>
+      </p:sp>
+      <p:sp>
+        <p:nvSpPr>
+          <p:cNvPr id="18" name="Shape 16"/>
+          <p:cNvSpPr/>
+          <p:nvPr/>
+        </p:nvSpPr>
+        <p:spPr>
+          <a:xfrm>
+            <a:off x="9287967" y="91440"/>
+            <a:ext cx="27432" cy="274320"/>
+          </a:xfrm>
+          <a:prstGeom prst="rect">
+            <a:avLst/>
+          </a:prstGeom>
+          <a:solidFill>
+            <a:srgbClr val="B45309"/>
+          </a:solidFill>
+          <a:ln w="12700">
+            <a:solidFill>
+              <a:srgbClr val="B45309"/>
+            </a:solidFill>
+            <a:prstDash val="solid"/>
+          </a:ln>
+        </p:spPr>
+      </p:sp>
+      <p:sp>
+        <p:nvSpPr>
+          <p:cNvPr id="19" name="Shape 17"/>
+          <p:cNvSpPr/>
+          <p:nvPr/>
+        </p:nvSpPr>
+        <p:spPr>
+          <a:xfrm>
+            <a:off x="9342831" y="91440"/>
+            <a:ext cx="27432" cy="274320"/>
+          </a:xfrm>
+          <a:prstGeom prst="rect">
+            <a:avLst/>
+          </a:prstGeom>
+          <a:solidFill>
+            <a:srgbClr val="B45309"/>
+          </a:solidFill>
+          <a:ln w="12700">
+            <a:solidFill>
+              <a:srgbClr val="B45309"/>
+            </a:solidFill>
+            <a:prstDash val="solid"/>
+          </a:ln>
+        </p:spPr>
+      </p:sp>
+      <p:pic>
+        <p:nvPicPr>
+          <p:cNvPr id="20" name="Image 0" descr="preencoded.png">    </p:cNvPr>
+          <p:cNvPicPr>
+            <a:picLocks noChangeAspect="1"/>
+          </p:cNvPicPr>
+          <p:nvPr/>
+        </p:nvPicPr>
+        <p:blipFill>
+          <a:blip r:embed="rId1"/>
+          <a:stretch>
+            <a:fillRect/>
+          </a:stretch>
+        </p:blipFill>
+        <p:spPr>
+          <a:xfrm>
+            <a:off x="9415983" y="128016"/>
+            <a:ext cx="201168" cy="201168"/>
+          </a:xfrm>
+          <a:prstGeom prst="rect">
+            <a:avLst/>
+          </a:prstGeom>
+        </p:spPr>
+      </p:pic>
+      <p:sp>
+        <p:nvSpPr>
+          <p:cNvPr id="21" name="Text 18"/>
+          <p:cNvSpPr txBox="1"/>
+          <p:nvPr/>
+        </p:nvSpPr>
+        <p:spPr>
+          <a:xfrm>
+            <a:off x="9672015" y="91440"/>
+            <a:ext cx="1934464" cy="274320"/>
+          </a:xfrm>
+          <a:prstGeom prst="rect">
+            <a:avLst/>
+          </a:prstGeom>
+          <a:noFill/>
+          <a:ln/>
+        </p:spPr>
+        <p:txBody>
+          <a:bodyPr wrap="square" lIns="0" tIns="0" rIns="0" bIns="0" rtlCol="0" anchor="ctr"/>
+          <a:lstStyle/>
+          <a:p>
+            <a:pPr indent="0" marL="0">
+              <a:buNone/>
+            </a:pPr>
+            <a:r>
+              <a:rPr lang="en-US" sz="1100" b="1" dirty="0">
+                <a:solidFill>
+                  <a:srgbClr val="92400E"/>
+                </a:solidFill>
+                <a:latin typeface="Calibri" pitchFamily="34" charset="0"/>
+                <a:ea typeface="Calibri" pitchFamily="34" charset="-122"/>
+                <a:cs typeface="Calibri" pitchFamily="34" charset="-120"/>
+              </a:rPr>
+              <a:t>USE NOW</a:t>
+            </a:r>
+            <a:pPr indent="0" marL="0">
+              <a:buNone/>
+            </a:pPr>
+            <a:r>
+              <a:rPr lang="en-US" sz="1100" dirty="0">
+                <a:solidFill>
+                  <a:srgbClr val="92400E"/>
+                </a:solidFill>
+                <a:latin typeface="Calibri" pitchFamily="34" charset="0"/>
+                <a:ea typeface="Calibri" pitchFamily="34" charset="-122"/>
+                <a:cs typeface="Calibri" pitchFamily="34" charset="-120"/>
+              </a:rPr>
+              <a:t> · the PRG32 tools</a:t>
+            </a:r>
+            <a:endParaRPr lang="en-US" sz="1100" dirty="0"/>
+          </a:p>
+        </p:txBody>
+      </p:sp>
+      <p:sp>
+        <p:nvSpPr>
           <p:cNvPr id="25" name="Slide Number Placeholder 0"/>
           <p:cNvSpPr>
             <a:spLocks noGrp="1"/>
@@ -6537,6 +7244,158 @@
       </p:sp>
       <p:sp>
         <p:nvSpPr>
+          <p:cNvPr id="17" name="Shape 15"/>
+          <p:cNvSpPr/>
+          <p:nvPr/>
+        </p:nvSpPr>
+        <p:spPr>
+          <a:xfrm>
+            <a:off x="9287967" y="91440"/>
+            <a:ext cx="2355088" cy="274320"/>
+          </a:xfrm>
+          <a:prstGeom prst="rect">
+            <a:avLst/>
+          </a:prstGeom>
+          <a:solidFill>
+            <a:srgbClr val="FEF3C7"/>
+          </a:solidFill>
+          <a:ln w="12700">
+            <a:solidFill>
+              <a:srgbClr val="B45309"/>
+            </a:solidFill>
+            <a:prstDash val="solid"/>
+          </a:ln>
+        </p:spPr>
+      </p:sp>
+      <p:sp>
+        <p:nvSpPr>
+          <p:cNvPr id="18" name="Shape 16"/>
+          <p:cNvSpPr/>
+          <p:nvPr/>
+        </p:nvSpPr>
+        <p:spPr>
+          <a:xfrm>
+            <a:off x="9287967" y="91440"/>
+            <a:ext cx="27432" cy="274320"/>
+          </a:xfrm>
+          <a:prstGeom prst="rect">
+            <a:avLst/>
+          </a:prstGeom>
+          <a:solidFill>
+            <a:srgbClr val="B45309"/>
+          </a:solidFill>
+          <a:ln w="12700">
+            <a:solidFill>
+              <a:srgbClr val="B45309"/>
+            </a:solidFill>
+            <a:prstDash val="solid"/>
+          </a:ln>
+        </p:spPr>
+      </p:sp>
+      <p:sp>
+        <p:nvSpPr>
+          <p:cNvPr id="19" name="Shape 17"/>
+          <p:cNvSpPr/>
+          <p:nvPr/>
+        </p:nvSpPr>
+        <p:spPr>
+          <a:xfrm>
+            <a:off x="9342831" y="91440"/>
+            <a:ext cx="27432" cy="274320"/>
+          </a:xfrm>
+          <a:prstGeom prst="rect">
+            <a:avLst/>
+          </a:prstGeom>
+          <a:solidFill>
+            <a:srgbClr val="B45309"/>
+          </a:solidFill>
+          <a:ln w="12700">
+            <a:solidFill>
+              <a:srgbClr val="B45309"/>
+            </a:solidFill>
+            <a:prstDash val="solid"/>
+          </a:ln>
+        </p:spPr>
+      </p:sp>
+      <p:pic>
+        <p:nvPicPr>
+          <p:cNvPr id="20" name="Image 0" descr="preencoded.png">    </p:cNvPr>
+          <p:cNvPicPr>
+            <a:picLocks noChangeAspect="1"/>
+          </p:cNvPicPr>
+          <p:nvPr/>
+        </p:nvPicPr>
+        <p:blipFill>
+          <a:blip r:embed="rId1"/>
+          <a:stretch>
+            <a:fillRect/>
+          </a:stretch>
+        </p:blipFill>
+        <p:spPr>
+          <a:xfrm>
+            <a:off x="9415983" y="128016"/>
+            <a:ext cx="201168" cy="201168"/>
+          </a:xfrm>
+          <a:prstGeom prst="rect">
+            <a:avLst/>
+          </a:prstGeom>
+        </p:spPr>
+      </p:pic>
+      <p:sp>
+        <p:nvSpPr>
+          <p:cNvPr id="21" name="Text 18"/>
+          <p:cNvSpPr txBox="1"/>
+          <p:nvPr/>
+        </p:nvSpPr>
+        <p:spPr>
+          <a:xfrm>
+            <a:off x="9672015" y="91440"/>
+            <a:ext cx="1934464" cy="274320"/>
+          </a:xfrm>
+          <a:prstGeom prst="rect">
+            <a:avLst/>
+          </a:prstGeom>
+          <a:noFill/>
+          <a:ln/>
+        </p:spPr>
+        <p:txBody>
+          <a:bodyPr wrap="square" lIns="0" tIns="0" rIns="0" bIns="0" rtlCol="0" anchor="ctr"/>
+          <a:lstStyle/>
+          <a:p>
+            <a:pPr indent="0" marL="0">
+              <a:buNone/>
+            </a:pPr>
+            <a:r>
+              <a:rPr lang="en-US" sz="1100" b="1" dirty="0">
+                <a:solidFill>
+                  <a:srgbClr val="92400E"/>
+                </a:solidFill>
+                <a:latin typeface="Calibri" pitchFamily="34" charset="0"/>
+                <a:ea typeface="Calibri" pitchFamily="34" charset="-122"/>
+                <a:cs typeface="Calibri" pitchFamily="34" charset="-120"/>
+              </a:rPr>
+              <a:t>USE NOW</a:t>
+            </a:r>
+            <a:pPr indent="0" marL="0">
+              <a:buNone/>
+            </a:pPr>
+            <a:r>
+              <a:rPr lang="en-US" sz="1100" dirty="0">
+                <a:solidFill>
+                  <a:srgbClr val="92400E"/>
+                </a:solidFill>
+                <a:latin typeface="Calibri" pitchFamily="34" charset="0"/>
+                <a:ea typeface="Calibri" pitchFamily="34" charset="-122"/>
+                <a:cs typeface="Calibri" pitchFamily="34" charset="-120"/>
+              </a:rPr>
+              <a:t> · the PRG32 tools</a:t>
+            </a:r>
+            <a:endParaRPr lang="en-US" sz="1100" dirty="0"/>
+          </a:p>
+        </p:txBody>
+      </p:sp>
+      <p:sp>
+        <p:nvSpPr>
           <p:cNvPr id="25" name="Slide Number Placeholder 0"/>
           <p:cNvSpPr>
             <a:spLocks noGrp="1"/>
@@ -7317,6 +8176,158 @@
               <a:t>A black screen: check the wiring of the display against the firmware</a:t>
             </a:r>
             <a:endParaRPr lang="en-US" sz="1200" dirty="0"/>
+          </a:p>
+        </p:txBody>
+      </p:sp>
+      <p:sp>
+        <p:nvSpPr>
+          <p:cNvPr id="17" name="Shape 15"/>
+          <p:cNvSpPr/>
+          <p:nvPr/>
+        </p:nvSpPr>
+        <p:spPr>
+          <a:xfrm>
+            <a:off x="9287967" y="91440"/>
+            <a:ext cx="2355088" cy="274320"/>
+          </a:xfrm>
+          <a:prstGeom prst="rect">
+            <a:avLst/>
+          </a:prstGeom>
+          <a:solidFill>
+            <a:srgbClr val="FEF3C7"/>
+          </a:solidFill>
+          <a:ln w="12700">
+            <a:solidFill>
+              <a:srgbClr val="B45309"/>
+            </a:solidFill>
+            <a:prstDash val="solid"/>
+          </a:ln>
+        </p:spPr>
+      </p:sp>
+      <p:sp>
+        <p:nvSpPr>
+          <p:cNvPr id="18" name="Shape 16"/>
+          <p:cNvSpPr/>
+          <p:nvPr/>
+        </p:nvSpPr>
+        <p:spPr>
+          <a:xfrm>
+            <a:off x="9287967" y="91440"/>
+            <a:ext cx="27432" cy="274320"/>
+          </a:xfrm>
+          <a:prstGeom prst="rect">
+            <a:avLst/>
+          </a:prstGeom>
+          <a:solidFill>
+            <a:srgbClr val="B45309"/>
+          </a:solidFill>
+          <a:ln w="12700">
+            <a:solidFill>
+              <a:srgbClr val="B45309"/>
+            </a:solidFill>
+            <a:prstDash val="solid"/>
+          </a:ln>
+        </p:spPr>
+      </p:sp>
+      <p:sp>
+        <p:nvSpPr>
+          <p:cNvPr id="19" name="Shape 17"/>
+          <p:cNvSpPr/>
+          <p:nvPr/>
+        </p:nvSpPr>
+        <p:spPr>
+          <a:xfrm>
+            <a:off x="9342831" y="91440"/>
+            <a:ext cx="27432" cy="274320"/>
+          </a:xfrm>
+          <a:prstGeom prst="rect">
+            <a:avLst/>
+          </a:prstGeom>
+          <a:solidFill>
+            <a:srgbClr val="B45309"/>
+          </a:solidFill>
+          <a:ln w="12700">
+            <a:solidFill>
+              <a:srgbClr val="B45309"/>
+            </a:solidFill>
+            <a:prstDash val="solid"/>
+          </a:ln>
+        </p:spPr>
+      </p:sp>
+      <p:pic>
+        <p:nvPicPr>
+          <p:cNvPr id="20" name="Image 0" descr="preencoded.png">    </p:cNvPr>
+          <p:cNvPicPr>
+            <a:picLocks noChangeAspect="1"/>
+          </p:cNvPicPr>
+          <p:nvPr/>
+        </p:nvPicPr>
+        <p:blipFill>
+          <a:blip r:embed="rId1"/>
+          <a:stretch>
+            <a:fillRect/>
+          </a:stretch>
+        </p:blipFill>
+        <p:spPr>
+          <a:xfrm>
+            <a:off x="9415983" y="128016"/>
+            <a:ext cx="201168" cy="201168"/>
+          </a:xfrm>
+          <a:prstGeom prst="rect">
+            <a:avLst/>
+          </a:prstGeom>
+        </p:spPr>
+      </p:pic>
+      <p:sp>
+        <p:nvSpPr>
+          <p:cNvPr id="21" name="Text 18"/>
+          <p:cNvSpPr txBox="1"/>
+          <p:nvPr/>
+        </p:nvSpPr>
+        <p:spPr>
+          <a:xfrm>
+            <a:off x="9672015" y="91440"/>
+            <a:ext cx="1934464" cy="274320"/>
+          </a:xfrm>
+          <a:prstGeom prst="rect">
+            <a:avLst/>
+          </a:prstGeom>
+          <a:noFill/>
+          <a:ln/>
+        </p:spPr>
+        <p:txBody>
+          <a:bodyPr wrap="square" lIns="0" tIns="0" rIns="0" bIns="0" rtlCol="0" anchor="ctr"/>
+          <a:lstStyle/>
+          <a:p>
+            <a:pPr indent="0" marL="0">
+              <a:buNone/>
+            </a:pPr>
+            <a:r>
+              <a:rPr lang="en-US" sz="1100" b="1" dirty="0">
+                <a:solidFill>
+                  <a:srgbClr val="92400E"/>
+                </a:solidFill>
+                <a:latin typeface="Calibri" pitchFamily="34" charset="0"/>
+                <a:ea typeface="Calibri" pitchFamily="34" charset="-122"/>
+                <a:cs typeface="Calibri" pitchFamily="34" charset="-120"/>
+              </a:rPr>
+              <a:t>USE NOW</a:t>
+            </a:r>
+            <a:pPr indent="0" marL="0">
+              <a:buNone/>
+            </a:pPr>
+            <a:r>
+              <a:rPr lang="en-US" sz="1100" dirty="0">
+                <a:solidFill>
+                  <a:srgbClr val="92400E"/>
+                </a:solidFill>
+                <a:latin typeface="Calibri" pitchFamily="34" charset="0"/>
+                <a:ea typeface="Calibri" pitchFamily="34" charset="-122"/>
+                <a:cs typeface="Calibri" pitchFamily="34" charset="-120"/>
+              </a:rPr>
+              <a:t> · the PRG32 tools</a:t>
+            </a:r>
+            <a:endParaRPr lang="en-US" sz="1100" dirty="0"/>
           </a:p>
         </p:txBody>
       </p:sp>
@@ -8703,6 +9714,158 @@
       </p:graphicFrame>
       <p:sp>
         <p:nvSpPr>
+          <p:cNvPr id="4" name="Shape 1"/>
+          <p:cNvSpPr/>
+          <p:nvPr/>
+        </p:nvSpPr>
+        <p:spPr>
+          <a:xfrm>
+            <a:off x="9287967" y="91440"/>
+            <a:ext cx="2355088" cy="274320"/>
+          </a:xfrm>
+          <a:prstGeom prst="rect">
+            <a:avLst/>
+          </a:prstGeom>
+          <a:solidFill>
+            <a:srgbClr val="FEF3C7"/>
+          </a:solidFill>
+          <a:ln w="12700">
+            <a:solidFill>
+              <a:srgbClr val="B45309"/>
+            </a:solidFill>
+            <a:prstDash val="solid"/>
+          </a:ln>
+        </p:spPr>
+      </p:sp>
+      <p:sp>
+        <p:nvSpPr>
+          <p:cNvPr id="5" name="Shape 2"/>
+          <p:cNvSpPr/>
+          <p:nvPr/>
+        </p:nvSpPr>
+        <p:spPr>
+          <a:xfrm>
+            <a:off x="9287967" y="91440"/>
+            <a:ext cx="27432" cy="274320"/>
+          </a:xfrm>
+          <a:prstGeom prst="rect">
+            <a:avLst/>
+          </a:prstGeom>
+          <a:solidFill>
+            <a:srgbClr val="B45309"/>
+          </a:solidFill>
+          <a:ln w="12700">
+            <a:solidFill>
+              <a:srgbClr val="B45309"/>
+            </a:solidFill>
+            <a:prstDash val="solid"/>
+          </a:ln>
+        </p:spPr>
+      </p:sp>
+      <p:sp>
+        <p:nvSpPr>
+          <p:cNvPr id="6" name="Shape 3"/>
+          <p:cNvSpPr/>
+          <p:nvPr/>
+        </p:nvSpPr>
+        <p:spPr>
+          <a:xfrm>
+            <a:off x="9342831" y="91440"/>
+            <a:ext cx="27432" cy="274320"/>
+          </a:xfrm>
+          <a:prstGeom prst="rect">
+            <a:avLst/>
+          </a:prstGeom>
+          <a:solidFill>
+            <a:srgbClr val="B45309"/>
+          </a:solidFill>
+          <a:ln w="12700">
+            <a:solidFill>
+              <a:srgbClr val="B45309"/>
+            </a:solidFill>
+            <a:prstDash val="solid"/>
+          </a:ln>
+        </p:spPr>
+      </p:sp>
+      <p:pic>
+        <p:nvPicPr>
+          <p:cNvPr id="7" name="Image 0" descr="preencoded.png">    </p:cNvPr>
+          <p:cNvPicPr>
+            <a:picLocks noChangeAspect="1"/>
+          </p:cNvPicPr>
+          <p:nvPr/>
+        </p:nvPicPr>
+        <p:blipFill>
+          <a:blip r:embed="rId1"/>
+          <a:stretch>
+            <a:fillRect/>
+          </a:stretch>
+        </p:blipFill>
+        <p:spPr>
+          <a:xfrm>
+            <a:off x="9415983" y="128016"/>
+            <a:ext cx="201168" cy="201168"/>
+          </a:xfrm>
+          <a:prstGeom prst="rect">
+            <a:avLst/>
+          </a:prstGeom>
+        </p:spPr>
+      </p:pic>
+      <p:sp>
+        <p:nvSpPr>
+          <p:cNvPr id="8" name="Text 4"/>
+          <p:cNvSpPr txBox="1"/>
+          <p:nvPr/>
+        </p:nvSpPr>
+        <p:spPr>
+          <a:xfrm>
+            <a:off x="9672015" y="91440"/>
+            <a:ext cx="1934464" cy="274320"/>
+          </a:xfrm>
+          <a:prstGeom prst="rect">
+            <a:avLst/>
+          </a:prstGeom>
+          <a:noFill/>
+          <a:ln/>
+        </p:spPr>
+        <p:txBody>
+          <a:bodyPr wrap="square" lIns="0" tIns="0" rIns="0" bIns="0" rtlCol="0" anchor="ctr"/>
+          <a:lstStyle/>
+          <a:p>
+            <a:pPr indent="0" marL="0">
+              <a:buNone/>
+            </a:pPr>
+            <a:r>
+              <a:rPr lang="en-US" sz="1100" b="1" dirty="0">
+                <a:solidFill>
+                  <a:srgbClr val="92400E"/>
+                </a:solidFill>
+                <a:latin typeface="Calibri" pitchFamily="34" charset="0"/>
+                <a:ea typeface="Calibri" pitchFamily="34" charset="-122"/>
+                <a:cs typeface="Calibri" pitchFamily="34" charset="-120"/>
+              </a:rPr>
+              <a:t>USE NOW</a:t>
+            </a:r>
+            <a:pPr indent="0" marL="0">
+              <a:buNone/>
+            </a:pPr>
+            <a:r>
+              <a:rPr lang="en-US" sz="1100" dirty="0">
+                <a:solidFill>
+                  <a:srgbClr val="92400E"/>
+                </a:solidFill>
+                <a:latin typeface="Calibri" pitchFamily="34" charset="0"/>
+                <a:ea typeface="Calibri" pitchFamily="34" charset="-122"/>
+                <a:cs typeface="Calibri" pitchFamily="34" charset="-120"/>
+              </a:rPr>
+              <a:t> · the PRG32 tools</a:t>
+            </a:r>
+            <a:endParaRPr lang="en-US" sz="1100" dirty="0"/>
+          </a:p>
+        </p:txBody>
+      </p:sp>
+      <p:sp>
+        <p:nvSpPr>
           <p:cNvPr id="25" name="Slide Number Placeholder 0"/>
           <p:cNvSpPr>
             <a:spLocks noGrp="1"/>
@@ -10666,6 +11829,285 @@
       </p:sp>
       <p:sp>
         <p:nvSpPr>
+          <p:cNvPr id="17" name="Shape 15"/>
+          <p:cNvSpPr/>
+          <p:nvPr/>
+        </p:nvSpPr>
+        <p:spPr>
+          <a:xfrm>
+            <a:off x="9287967" y="91440"/>
+            <a:ext cx="2355088" cy="274320"/>
+          </a:xfrm>
+          <a:prstGeom prst="rect">
+            <a:avLst/>
+          </a:prstGeom>
+          <a:solidFill>
+            <a:srgbClr val="FEF3C7"/>
+          </a:solidFill>
+          <a:ln w="12700">
+            <a:solidFill>
+              <a:srgbClr val="B45309"/>
+            </a:solidFill>
+            <a:prstDash val="solid"/>
+          </a:ln>
+        </p:spPr>
+      </p:sp>
+      <p:sp>
+        <p:nvSpPr>
+          <p:cNvPr id="18" name="Shape 16"/>
+          <p:cNvSpPr/>
+          <p:nvPr/>
+        </p:nvSpPr>
+        <p:spPr>
+          <a:xfrm>
+            <a:off x="9287967" y="91440"/>
+            <a:ext cx="27432" cy="274320"/>
+          </a:xfrm>
+          <a:prstGeom prst="rect">
+            <a:avLst/>
+          </a:prstGeom>
+          <a:solidFill>
+            <a:srgbClr val="B45309"/>
+          </a:solidFill>
+          <a:ln w="12700">
+            <a:solidFill>
+              <a:srgbClr val="B45309"/>
+            </a:solidFill>
+            <a:prstDash val="solid"/>
+          </a:ln>
+        </p:spPr>
+      </p:sp>
+      <p:sp>
+        <p:nvSpPr>
+          <p:cNvPr id="19" name="Shape 17"/>
+          <p:cNvSpPr/>
+          <p:nvPr/>
+        </p:nvSpPr>
+        <p:spPr>
+          <a:xfrm>
+            <a:off x="9342831" y="91440"/>
+            <a:ext cx="27432" cy="274320"/>
+          </a:xfrm>
+          <a:prstGeom prst="rect">
+            <a:avLst/>
+          </a:prstGeom>
+          <a:solidFill>
+            <a:srgbClr val="B45309"/>
+          </a:solidFill>
+          <a:ln w="12700">
+            <a:solidFill>
+              <a:srgbClr val="B45309"/>
+            </a:solidFill>
+            <a:prstDash val="solid"/>
+          </a:ln>
+        </p:spPr>
+      </p:sp>
+      <p:pic>
+        <p:nvPicPr>
+          <p:cNvPr id="20" name="Image 0" descr="preencoded.png">    </p:cNvPr>
+          <p:cNvPicPr>
+            <a:picLocks noChangeAspect="1"/>
+          </p:cNvPicPr>
+          <p:nvPr/>
+        </p:nvPicPr>
+        <p:blipFill>
+          <a:blip r:embed="rId1"/>
+          <a:stretch>
+            <a:fillRect/>
+          </a:stretch>
+        </p:blipFill>
+        <p:spPr>
+          <a:xfrm>
+            <a:off x="9415983" y="128016"/>
+            <a:ext cx="201168" cy="201168"/>
+          </a:xfrm>
+          <a:prstGeom prst="rect">
+            <a:avLst/>
+          </a:prstGeom>
+        </p:spPr>
+      </p:pic>
+      <p:sp>
+        <p:nvSpPr>
+          <p:cNvPr id="21" name="Text 18"/>
+          <p:cNvSpPr txBox="1"/>
+          <p:nvPr/>
+        </p:nvSpPr>
+        <p:spPr>
+          <a:xfrm>
+            <a:off x="9672015" y="91440"/>
+            <a:ext cx="1934464" cy="274320"/>
+          </a:xfrm>
+          <a:prstGeom prst="rect">
+            <a:avLst/>
+          </a:prstGeom>
+          <a:noFill/>
+          <a:ln/>
+        </p:spPr>
+        <p:txBody>
+          <a:bodyPr wrap="square" lIns="0" tIns="0" rIns="0" bIns="0" rtlCol="0" anchor="ctr"/>
+          <a:lstStyle/>
+          <a:p>
+            <a:pPr indent="0" marL="0">
+              <a:buNone/>
+            </a:pPr>
+            <a:r>
+              <a:rPr lang="en-US" sz="1100" b="1" dirty="0">
+                <a:solidFill>
+                  <a:srgbClr val="92400E"/>
+                </a:solidFill>
+                <a:latin typeface="Calibri" pitchFamily="34" charset="0"/>
+                <a:ea typeface="Calibri" pitchFamily="34" charset="-122"/>
+                <a:cs typeface="Calibri" pitchFamily="34" charset="-120"/>
+              </a:rPr>
+              <a:t>USE NOW</a:t>
+            </a:r>
+            <a:pPr indent="0" marL="0">
+              <a:buNone/>
+            </a:pPr>
+            <a:r>
+              <a:rPr lang="en-US" sz="1100" dirty="0">
+                <a:solidFill>
+                  <a:srgbClr val="92400E"/>
+                </a:solidFill>
+                <a:latin typeface="Calibri" pitchFamily="34" charset="0"/>
+                <a:ea typeface="Calibri" pitchFamily="34" charset="-122"/>
+                <a:cs typeface="Calibri" pitchFamily="34" charset="-120"/>
+              </a:rPr>
+              <a:t> · the PRG32 tools</a:t>
+            </a:r>
+            <a:endParaRPr lang="en-US" sz="1100" dirty="0"/>
+          </a:p>
+        </p:txBody>
+      </p:sp>
+      <p:sp>
+        <p:nvSpPr>
+          <p:cNvPr id="22" name="Shape 19"/>
+          <p:cNvSpPr/>
+          <p:nvPr/>
+        </p:nvSpPr>
+        <p:spPr>
+          <a:xfrm>
+            <a:off x="5757240" y="91440"/>
+            <a:ext cx="3420999" cy="274320"/>
+          </a:xfrm>
+          <a:prstGeom prst="rect">
+            <a:avLst/>
+          </a:prstGeom>
+          <a:solidFill>
+            <a:srgbClr val="E0F2FE"/>
+          </a:solidFill>
+          <a:ln w="12700">
+            <a:solidFill>
+              <a:srgbClr val="0369A1"/>
+            </a:solidFill>
+            <a:prstDash val="solid"/>
+          </a:ln>
+        </p:spPr>
+      </p:sp>
+      <p:sp>
+        <p:nvSpPr>
+          <p:cNvPr id="23" name="Shape 20"/>
+          <p:cNvSpPr/>
+          <p:nvPr/>
+        </p:nvSpPr>
+        <p:spPr>
+          <a:xfrm>
+            <a:off x="5757240" y="91440"/>
+            <a:ext cx="73152" cy="274320"/>
+          </a:xfrm>
+          <a:prstGeom prst="rect">
+            <a:avLst/>
+          </a:prstGeom>
+          <a:solidFill>
+            <a:srgbClr val="0369A1"/>
+          </a:solidFill>
+          <a:ln w="12700">
+            <a:solidFill>
+              <a:srgbClr val="0369A1"/>
+            </a:solidFill>
+            <a:prstDash val="solid"/>
+          </a:ln>
+        </p:spPr>
+      </p:sp>
+      <p:pic>
+        <p:nvPicPr>
+          <p:cNvPr id="24" name="Image 1" descr="preencoded.png">    </p:cNvPr>
+          <p:cNvPicPr>
+            <a:picLocks noChangeAspect="1"/>
+          </p:cNvPicPr>
+          <p:nvPr/>
+        </p:nvPicPr>
+        <p:blipFill>
+          <a:blip r:embed="rId2"/>
+          <a:stretch>
+            <a:fillRect/>
+          </a:stretch>
+        </p:blipFill>
+        <p:spPr>
+          <a:xfrm>
+            <a:off x="5885256" y="128016"/>
+            <a:ext cx="201168" cy="201168"/>
+          </a:xfrm>
+          <a:prstGeom prst="rect">
+            <a:avLst/>
+          </a:prstGeom>
+        </p:spPr>
+      </p:pic>
+      <p:sp>
+        <p:nvSpPr>
+          <p:cNvPr id="25" name="Text 21"/>
+          <p:cNvSpPr txBox="1"/>
+          <p:nvPr/>
+        </p:nvSpPr>
+        <p:spPr>
+          <a:xfrm>
+            <a:off x="6141288" y="91440"/>
+            <a:ext cx="3000375" cy="274320"/>
+          </a:xfrm>
+          <a:prstGeom prst="rect">
+            <a:avLst/>
+          </a:prstGeom>
+          <a:noFill/>
+          <a:ln/>
+        </p:spPr>
+        <p:txBody>
+          <a:bodyPr wrap="square" lIns="0" tIns="0" rIns="0" bIns="0" rtlCol="0" anchor="ctr"/>
+          <a:lstStyle/>
+          <a:p>
+            <a:pPr indent="0" marL="0">
+              <a:buNone/>
+            </a:pPr>
+            <a:r>
+              <a:rPr lang="en-US" sz="1100" b="1" dirty="0">
+                <a:solidFill>
+                  <a:srgbClr val="075985"/>
+                </a:solidFill>
+                <a:latin typeface="Calibri" pitchFamily="34" charset="0"/>
+                <a:ea typeface="Calibri" pitchFamily="34" charset="-122"/>
+                <a:cs typeface="Calibri" pitchFamily="34" charset="-120"/>
+              </a:rPr>
+              <a:t>UNDERSTAND NOW</a:t>
+            </a:r>
+            <a:pPr indent="0" marL="0">
+              <a:buNone/>
+            </a:pPr>
+            <a:r>
+              <a:rPr lang="en-US" sz="1100" dirty="0">
+                <a:solidFill>
+                  <a:srgbClr val="075985"/>
+                </a:solidFill>
+                <a:latin typeface="Calibri" pitchFamily="34" charset="0"/>
+                <a:ea typeface="Calibri" pitchFamily="34" charset="-122"/>
+                <a:cs typeface="Calibri" pitchFamily="34" charset="-120"/>
+              </a:rPr>
+              <a:t> · the portable cartridge</a:t>
+            </a:r>
+            <a:endParaRPr lang="en-US" sz="1100" dirty="0"/>
+          </a:p>
+        </p:txBody>
+      </p:sp>
+      <p:sp>
+        <p:nvSpPr>
           <p:cNvPr id="25" name="Slide Number Placeholder 0"/>
           <p:cNvSpPr>
             <a:spLocks noGrp="1"/>
@@ -11400,6 +12842,133 @@
       </p:sp>
       <p:sp>
         <p:nvSpPr>
+          <p:cNvPr id="17" name="Shape 15"/>
+          <p:cNvSpPr/>
+          <p:nvPr/>
+        </p:nvSpPr>
+        <p:spPr>
+          <a:xfrm>
+            <a:off x="8222056" y="91440"/>
+            <a:ext cx="3420999" cy="274320"/>
+          </a:xfrm>
+          <a:prstGeom prst="rect">
+            <a:avLst/>
+          </a:prstGeom>
+          <a:solidFill>
+            <a:srgbClr val="E0F2FE"/>
+          </a:solidFill>
+          <a:ln w="12700">
+            <a:solidFill>
+              <a:srgbClr val="0369A1"/>
+            </a:solidFill>
+            <a:prstDash val="solid"/>
+          </a:ln>
+        </p:spPr>
+      </p:sp>
+      <p:sp>
+        <p:nvSpPr>
+          <p:cNvPr id="18" name="Shape 16"/>
+          <p:cNvSpPr/>
+          <p:nvPr/>
+        </p:nvSpPr>
+        <p:spPr>
+          <a:xfrm>
+            <a:off x="8222056" y="91440"/>
+            <a:ext cx="73152" cy="274320"/>
+          </a:xfrm>
+          <a:prstGeom prst="rect">
+            <a:avLst/>
+          </a:prstGeom>
+          <a:solidFill>
+            <a:srgbClr val="0369A1"/>
+          </a:solidFill>
+          <a:ln w="12700">
+            <a:solidFill>
+              <a:srgbClr val="0369A1"/>
+            </a:solidFill>
+            <a:prstDash val="solid"/>
+          </a:ln>
+        </p:spPr>
+      </p:sp>
+      <p:pic>
+        <p:nvPicPr>
+          <p:cNvPr id="19" name="Image 0" descr="preencoded.png">    </p:cNvPr>
+          <p:cNvPicPr>
+            <a:picLocks noChangeAspect="1"/>
+          </p:cNvPicPr>
+          <p:nvPr/>
+        </p:nvPicPr>
+        <p:blipFill>
+          <a:blip r:embed="rId1"/>
+          <a:stretch>
+            <a:fillRect/>
+          </a:stretch>
+        </p:blipFill>
+        <p:spPr>
+          <a:xfrm>
+            <a:off x="8350072" y="128016"/>
+            <a:ext cx="201168" cy="201168"/>
+          </a:xfrm>
+          <a:prstGeom prst="rect">
+            <a:avLst/>
+          </a:prstGeom>
+        </p:spPr>
+      </p:pic>
+      <p:sp>
+        <p:nvSpPr>
+          <p:cNvPr id="20" name="Text 17"/>
+          <p:cNvSpPr txBox="1"/>
+          <p:nvPr/>
+        </p:nvSpPr>
+        <p:spPr>
+          <a:xfrm>
+            <a:off x="8606104" y="91440"/>
+            <a:ext cx="3000375" cy="274320"/>
+          </a:xfrm>
+          <a:prstGeom prst="rect">
+            <a:avLst/>
+          </a:prstGeom>
+          <a:noFill/>
+          <a:ln/>
+        </p:spPr>
+        <p:txBody>
+          <a:bodyPr wrap="square" lIns="0" tIns="0" rIns="0" bIns="0" rtlCol="0" anchor="ctr"/>
+          <a:lstStyle/>
+          <a:p>
+            <a:pPr indent="0" marL="0">
+              <a:buNone/>
+            </a:pPr>
+            <a:r>
+              <a:rPr lang="en-US" sz="1100" b="1" dirty="0">
+                <a:solidFill>
+                  <a:srgbClr val="075985"/>
+                </a:solidFill>
+                <a:latin typeface="Calibri" pitchFamily="34" charset="0"/>
+                <a:ea typeface="Calibri" pitchFamily="34" charset="-122"/>
+                <a:cs typeface="Calibri" pitchFamily="34" charset="-120"/>
+              </a:rPr>
+              <a:t>UNDERSTAND NOW</a:t>
+            </a:r>
+            <a:pPr indent="0" marL="0">
+              <a:buNone/>
+            </a:pPr>
+            <a:r>
+              <a:rPr lang="en-US" sz="1100" dirty="0">
+                <a:solidFill>
+                  <a:srgbClr val="075985"/>
+                </a:solidFill>
+                <a:latin typeface="Calibri" pitchFamily="34" charset="0"/>
+                <a:ea typeface="Calibri" pitchFamily="34" charset="-122"/>
+                <a:cs typeface="Calibri" pitchFamily="34" charset="-120"/>
+              </a:rPr>
+              <a:t> · the portable cartridge</a:t>
+            </a:r>
+            <a:endParaRPr lang="en-US" sz="1100" dirty="0"/>
+          </a:p>
+        </p:txBody>
+      </p:sp>
+      <p:sp>
+        <p:nvSpPr>
           <p:cNvPr id="25" name="Slide Number Placeholder 0"/>
           <p:cNvSpPr>
             <a:spLocks noGrp="1"/>
@@ -12287,6 +13856,133 @@
       </p:sp>
       <p:sp>
         <p:nvSpPr>
+          <p:cNvPr id="17" name="Shape 15"/>
+          <p:cNvSpPr/>
+          <p:nvPr/>
+        </p:nvSpPr>
+        <p:spPr>
+          <a:xfrm>
+            <a:off x="8090738" y="91440"/>
+            <a:ext cx="3552317" cy="274320"/>
+          </a:xfrm>
+          <a:prstGeom prst="rect">
+            <a:avLst/>
+          </a:prstGeom>
+          <a:solidFill>
+            <a:srgbClr val="E0F2FE"/>
+          </a:solidFill>
+          <a:ln w="12700">
+            <a:solidFill>
+              <a:srgbClr val="0369A1"/>
+            </a:solidFill>
+            <a:prstDash val="solid"/>
+          </a:ln>
+        </p:spPr>
+      </p:sp>
+      <p:sp>
+        <p:nvSpPr>
+          <p:cNvPr id="18" name="Shape 16"/>
+          <p:cNvSpPr/>
+          <p:nvPr/>
+        </p:nvSpPr>
+        <p:spPr>
+          <a:xfrm>
+            <a:off x="8090738" y="91440"/>
+            <a:ext cx="73152" cy="274320"/>
+          </a:xfrm>
+          <a:prstGeom prst="rect">
+            <a:avLst/>
+          </a:prstGeom>
+          <a:solidFill>
+            <a:srgbClr val="0369A1"/>
+          </a:solidFill>
+          <a:ln w="12700">
+            <a:solidFill>
+              <a:srgbClr val="0369A1"/>
+            </a:solidFill>
+            <a:prstDash val="solid"/>
+          </a:ln>
+        </p:spPr>
+      </p:sp>
+      <p:pic>
+        <p:nvPicPr>
+          <p:cNvPr id="19" name="Image 0" descr="preencoded.png">    </p:cNvPr>
+          <p:cNvPicPr>
+            <a:picLocks noChangeAspect="1"/>
+          </p:cNvPicPr>
+          <p:nvPr/>
+        </p:nvPicPr>
+        <p:blipFill>
+          <a:blip r:embed="rId1"/>
+          <a:stretch>
+            <a:fillRect/>
+          </a:stretch>
+        </p:blipFill>
+        <p:spPr>
+          <a:xfrm>
+            <a:off x="8218754" y="128016"/>
+            <a:ext cx="201168" cy="201168"/>
+          </a:xfrm>
+          <a:prstGeom prst="rect">
+            <a:avLst/>
+          </a:prstGeom>
+        </p:spPr>
+      </p:pic>
+      <p:sp>
+        <p:nvSpPr>
+          <p:cNvPr id="20" name="Text 17"/>
+          <p:cNvSpPr txBox="1"/>
+          <p:nvPr/>
+        </p:nvSpPr>
+        <p:spPr>
+          <a:xfrm>
+            <a:off x="8474786" y="91440"/>
+            <a:ext cx="3131693" cy="274320"/>
+          </a:xfrm>
+          <a:prstGeom prst="rect">
+            <a:avLst/>
+          </a:prstGeom>
+          <a:noFill/>
+          <a:ln/>
+        </p:spPr>
+        <p:txBody>
+          <a:bodyPr wrap="square" lIns="0" tIns="0" rIns="0" bIns="0" rtlCol="0" anchor="ctr"/>
+          <a:lstStyle/>
+          <a:p>
+            <a:pPr indent="0" marL="0">
+              <a:buNone/>
+            </a:pPr>
+            <a:r>
+              <a:rPr lang="en-US" sz="1100" b="1" dirty="0">
+                <a:solidFill>
+                  <a:srgbClr val="075985"/>
+                </a:solidFill>
+                <a:latin typeface="Calibri" pitchFamily="34" charset="0"/>
+                <a:ea typeface="Calibri" pitchFamily="34" charset="-122"/>
+                <a:cs typeface="Calibri" pitchFamily="34" charset="-120"/>
+              </a:rPr>
+              <a:t>UNDERSTAND NOW</a:t>
+            </a:r>
+            <a:pPr indent="0" marL="0">
+              <a:buNone/>
+            </a:pPr>
+            <a:r>
+              <a:rPr lang="en-US" sz="1100" dirty="0">
+                <a:solidFill>
+                  <a:srgbClr val="075985"/>
+                </a:solidFill>
+                <a:latin typeface="Calibri" pitchFamily="34" charset="0"/>
+                <a:ea typeface="Calibri" pitchFamily="34" charset="-122"/>
+                <a:cs typeface="Calibri" pitchFamily="34" charset="-120"/>
+              </a:rPr>
+              <a:t> · packaging and publishing</a:t>
+            </a:r>
+            <a:endParaRPr lang="en-US" sz="1100" dirty="0"/>
+          </a:p>
+        </p:txBody>
+      </p:sp>
+      <p:sp>
+        <p:nvSpPr>
           <p:cNvPr id="25" name="Slide Number Placeholder 0"/>
           <p:cNvSpPr>
             <a:spLocks noGrp="1"/>
@@ -13310,6 +15006,133 @@
       </p:sp>
       <p:sp>
         <p:nvSpPr>
+          <p:cNvPr id="17" name="Shape 15"/>
+          <p:cNvSpPr/>
+          <p:nvPr/>
+        </p:nvSpPr>
+        <p:spPr>
+          <a:xfrm>
+            <a:off x="8090738" y="91440"/>
+            <a:ext cx="3552317" cy="274320"/>
+          </a:xfrm>
+          <a:prstGeom prst="rect">
+            <a:avLst/>
+          </a:prstGeom>
+          <a:solidFill>
+            <a:srgbClr val="E0F2FE"/>
+          </a:solidFill>
+          <a:ln w="12700">
+            <a:solidFill>
+              <a:srgbClr val="0369A1"/>
+            </a:solidFill>
+            <a:prstDash val="solid"/>
+          </a:ln>
+        </p:spPr>
+      </p:sp>
+      <p:sp>
+        <p:nvSpPr>
+          <p:cNvPr id="18" name="Shape 16"/>
+          <p:cNvSpPr/>
+          <p:nvPr/>
+        </p:nvSpPr>
+        <p:spPr>
+          <a:xfrm>
+            <a:off x="8090738" y="91440"/>
+            <a:ext cx="73152" cy="274320"/>
+          </a:xfrm>
+          <a:prstGeom prst="rect">
+            <a:avLst/>
+          </a:prstGeom>
+          <a:solidFill>
+            <a:srgbClr val="0369A1"/>
+          </a:solidFill>
+          <a:ln w="12700">
+            <a:solidFill>
+              <a:srgbClr val="0369A1"/>
+            </a:solidFill>
+            <a:prstDash val="solid"/>
+          </a:ln>
+        </p:spPr>
+      </p:sp>
+      <p:pic>
+        <p:nvPicPr>
+          <p:cNvPr id="19" name="Image 0" descr="preencoded.png">    </p:cNvPr>
+          <p:cNvPicPr>
+            <a:picLocks noChangeAspect="1"/>
+          </p:cNvPicPr>
+          <p:nvPr/>
+        </p:nvPicPr>
+        <p:blipFill>
+          <a:blip r:embed="rId1"/>
+          <a:stretch>
+            <a:fillRect/>
+          </a:stretch>
+        </p:blipFill>
+        <p:spPr>
+          <a:xfrm>
+            <a:off x="8218754" y="128016"/>
+            <a:ext cx="201168" cy="201168"/>
+          </a:xfrm>
+          <a:prstGeom prst="rect">
+            <a:avLst/>
+          </a:prstGeom>
+        </p:spPr>
+      </p:pic>
+      <p:sp>
+        <p:nvSpPr>
+          <p:cNvPr id="20" name="Text 17"/>
+          <p:cNvSpPr txBox="1"/>
+          <p:nvPr/>
+        </p:nvSpPr>
+        <p:spPr>
+          <a:xfrm>
+            <a:off x="8474786" y="91440"/>
+            <a:ext cx="3131693" cy="274320"/>
+          </a:xfrm>
+          <a:prstGeom prst="rect">
+            <a:avLst/>
+          </a:prstGeom>
+          <a:noFill/>
+          <a:ln/>
+        </p:spPr>
+        <p:txBody>
+          <a:bodyPr wrap="square" lIns="0" tIns="0" rIns="0" bIns="0" rtlCol="0" anchor="ctr"/>
+          <a:lstStyle/>
+          <a:p>
+            <a:pPr indent="0" marL="0">
+              <a:buNone/>
+            </a:pPr>
+            <a:r>
+              <a:rPr lang="en-US" sz="1100" b="1" dirty="0">
+                <a:solidFill>
+                  <a:srgbClr val="075985"/>
+                </a:solidFill>
+                <a:latin typeface="Calibri" pitchFamily="34" charset="0"/>
+                <a:ea typeface="Calibri" pitchFamily="34" charset="-122"/>
+                <a:cs typeface="Calibri" pitchFamily="34" charset="-120"/>
+              </a:rPr>
+              <a:t>UNDERSTAND NOW</a:t>
+            </a:r>
+            <a:pPr indent="0" marL="0">
+              <a:buNone/>
+            </a:pPr>
+            <a:r>
+              <a:rPr lang="en-US" sz="1100" dirty="0">
+                <a:solidFill>
+                  <a:srgbClr val="075985"/>
+                </a:solidFill>
+                <a:latin typeface="Calibri" pitchFamily="34" charset="0"/>
+                <a:ea typeface="Calibri" pitchFamily="34" charset="-122"/>
+                <a:cs typeface="Calibri" pitchFamily="34" charset="-120"/>
+              </a:rPr>
+              <a:t> · packaging and publishing</a:t>
+            </a:r>
+            <a:endParaRPr lang="en-US" sz="1100" dirty="0"/>
+          </a:p>
+        </p:txBody>
+      </p:sp>
+      <p:sp>
+        <p:nvSpPr>
           <p:cNvPr id="25" name="Slide Number Placeholder 0"/>
           <p:cNvSpPr>
             <a:spLocks noGrp="1"/>
@@ -14112,6 +15935,133 @@
       </p:sp>
       <p:sp>
         <p:nvSpPr>
+          <p:cNvPr id="17" name="Shape 15"/>
+          <p:cNvSpPr/>
+          <p:nvPr/>
+        </p:nvSpPr>
+        <p:spPr>
+          <a:xfrm>
+            <a:off x="8222056" y="91440"/>
+            <a:ext cx="3420999" cy="274320"/>
+          </a:xfrm>
+          <a:prstGeom prst="rect">
+            <a:avLst/>
+          </a:prstGeom>
+          <a:solidFill>
+            <a:srgbClr val="E0F2FE"/>
+          </a:solidFill>
+          <a:ln w="12700">
+            <a:solidFill>
+              <a:srgbClr val="0369A1"/>
+            </a:solidFill>
+            <a:prstDash val="solid"/>
+          </a:ln>
+        </p:spPr>
+      </p:sp>
+      <p:sp>
+        <p:nvSpPr>
+          <p:cNvPr id="18" name="Shape 16"/>
+          <p:cNvSpPr/>
+          <p:nvPr/>
+        </p:nvSpPr>
+        <p:spPr>
+          <a:xfrm>
+            <a:off x="8222056" y="91440"/>
+            <a:ext cx="73152" cy="274320"/>
+          </a:xfrm>
+          <a:prstGeom prst="rect">
+            <a:avLst/>
+          </a:prstGeom>
+          <a:solidFill>
+            <a:srgbClr val="0369A1"/>
+          </a:solidFill>
+          <a:ln w="12700">
+            <a:solidFill>
+              <a:srgbClr val="0369A1"/>
+            </a:solidFill>
+            <a:prstDash val="solid"/>
+          </a:ln>
+        </p:spPr>
+      </p:sp>
+      <p:pic>
+        <p:nvPicPr>
+          <p:cNvPr id="19" name="Image 0" descr="preencoded.png">    </p:cNvPr>
+          <p:cNvPicPr>
+            <a:picLocks noChangeAspect="1"/>
+          </p:cNvPicPr>
+          <p:nvPr/>
+        </p:nvPicPr>
+        <p:blipFill>
+          <a:blip r:embed="rId1"/>
+          <a:stretch>
+            <a:fillRect/>
+          </a:stretch>
+        </p:blipFill>
+        <p:spPr>
+          <a:xfrm>
+            <a:off x="8350072" y="128016"/>
+            <a:ext cx="201168" cy="201168"/>
+          </a:xfrm>
+          <a:prstGeom prst="rect">
+            <a:avLst/>
+          </a:prstGeom>
+        </p:spPr>
+      </p:pic>
+      <p:sp>
+        <p:nvSpPr>
+          <p:cNvPr id="20" name="Text 17"/>
+          <p:cNvSpPr txBox="1"/>
+          <p:nvPr/>
+        </p:nvSpPr>
+        <p:spPr>
+          <a:xfrm>
+            <a:off x="8606104" y="91440"/>
+            <a:ext cx="3000375" cy="274320"/>
+          </a:xfrm>
+          <a:prstGeom prst="rect">
+            <a:avLst/>
+          </a:prstGeom>
+          <a:noFill/>
+          <a:ln/>
+        </p:spPr>
+        <p:txBody>
+          <a:bodyPr wrap="square" lIns="0" tIns="0" rIns="0" bIns="0" rtlCol="0" anchor="ctr"/>
+          <a:lstStyle/>
+          <a:p>
+            <a:pPr indent="0" marL="0">
+              <a:buNone/>
+            </a:pPr>
+            <a:r>
+              <a:rPr lang="en-US" sz="1100" b="1" dirty="0">
+                <a:solidFill>
+                  <a:srgbClr val="075985"/>
+                </a:solidFill>
+                <a:latin typeface="Calibri" pitchFamily="34" charset="0"/>
+                <a:ea typeface="Calibri" pitchFamily="34" charset="-122"/>
+                <a:cs typeface="Calibri" pitchFamily="34" charset="-120"/>
+              </a:rPr>
+              <a:t>UNDERSTAND NOW</a:t>
+            </a:r>
+            <a:pPr indent="0" marL="0">
+              <a:buNone/>
+            </a:pPr>
+            <a:r>
+              <a:rPr lang="en-US" sz="1100" dirty="0">
+                <a:solidFill>
+                  <a:srgbClr val="075985"/>
+                </a:solidFill>
+                <a:latin typeface="Calibri" pitchFamily="34" charset="0"/>
+                <a:ea typeface="Calibri" pitchFamily="34" charset="-122"/>
+                <a:cs typeface="Calibri" pitchFamily="34" charset="-120"/>
+              </a:rPr>
+              <a:t> · the portable cartridge</a:t>
+            </a:r>
+            <a:endParaRPr lang="en-US" sz="1100" dirty="0"/>
+          </a:p>
+        </p:txBody>
+      </p:sp>
+      <p:sp>
+        <p:nvSpPr>
           <p:cNvPr id="25" name="Slide Number Placeholder 0"/>
           <p:cNvSpPr>
             <a:spLocks noGrp="1"/>
@@ -14982,6 +16932,133 @@
       </p:sp>
       <p:sp>
         <p:nvSpPr>
+          <p:cNvPr id="17" name="Shape 15"/>
+          <p:cNvSpPr/>
+          <p:nvPr/>
+        </p:nvSpPr>
+        <p:spPr>
+          <a:xfrm>
+            <a:off x="8222056" y="91440"/>
+            <a:ext cx="3420999" cy="274320"/>
+          </a:xfrm>
+          <a:prstGeom prst="rect">
+            <a:avLst/>
+          </a:prstGeom>
+          <a:solidFill>
+            <a:srgbClr val="E0F2FE"/>
+          </a:solidFill>
+          <a:ln w="12700">
+            <a:solidFill>
+              <a:srgbClr val="0369A1"/>
+            </a:solidFill>
+            <a:prstDash val="solid"/>
+          </a:ln>
+        </p:spPr>
+      </p:sp>
+      <p:sp>
+        <p:nvSpPr>
+          <p:cNvPr id="18" name="Shape 16"/>
+          <p:cNvSpPr/>
+          <p:nvPr/>
+        </p:nvSpPr>
+        <p:spPr>
+          <a:xfrm>
+            <a:off x="8222056" y="91440"/>
+            <a:ext cx="73152" cy="274320"/>
+          </a:xfrm>
+          <a:prstGeom prst="rect">
+            <a:avLst/>
+          </a:prstGeom>
+          <a:solidFill>
+            <a:srgbClr val="0369A1"/>
+          </a:solidFill>
+          <a:ln w="12700">
+            <a:solidFill>
+              <a:srgbClr val="0369A1"/>
+            </a:solidFill>
+            <a:prstDash val="solid"/>
+          </a:ln>
+        </p:spPr>
+      </p:sp>
+      <p:pic>
+        <p:nvPicPr>
+          <p:cNvPr id="19" name="Image 0" descr="preencoded.png">    </p:cNvPr>
+          <p:cNvPicPr>
+            <a:picLocks noChangeAspect="1"/>
+          </p:cNvPicPr>
+          <p:nvPr/>
+        </p:nvPicPr>
+        <p:blipFill>
+          <a:blip r:embed="rId1"/>
+          <a:stretch>
+            <a:fillRect/>
+          </a:stretch>
+        </p:blipFill>
+        <p:spPr>
+          <a:xfrm>
+            <a:off x="8350072" y="128016"/>
+            <a:ext cx="201168" cy="201168"/>
+          </a:xfrm>
+          <a:prstGeom prst="rect">
+            <a:avLst/>
+          </a:prstGeom>
+        </p:spPr>
+      </p:pic>
+      <p:sp>
+        <p:nvSpPr>
+          <p:cNvPr id="20" name="Text 17"/>
+          <p:cNvSpPr txBox="1"/>
+          <p:nvPr/>
+        </p:nvSpPr>
+        <p:spPr>
+          <a:xfrm>
+            <a:off x="8606104" y="91440"/>
+            <a:ext cx="3000375" cy="274320"/>
+          </a:xfrm>
+          <a:prstGeom prst="rect">
+            <a:avLst/>
+          </a:prstGeom>
+          <a:noFill/>
+          <a:ln/>
+        </p:spPr>
+        <p:txBody>
+          <a:bodyPr wrap="square" lIns="0" tIns="0" rIns="0" bIns="0" rtlCol="0" anchor="ctr"/>
+          <a:lstStyle/>
+          <a:p>
+            <a:pPr indent="0" marL="0">
+              <a:buNone/>
+            </a:pPr>
+            <a:r>
+              <a:rPr lang="en-US" sz="1100" b="1" dirty="0">
+                <a:solidFill>
+                  <a:srgbClr val="075985"/>
+                </a:solidFill>
+                <a:latin typeface="Calibri" pitchFamily="34" charset="0"/>
+                <a:ea typeface="Calibri" pitchFamily="34" charset="-122"/>
+                <a:cs typeface="Calibri" pitchFamily="34" charset="-120"/>
+              </a:rPr>
+              <a:t>UNDERSTAND NOW</a:t>
+            </a:r>
+            <a:pPr indent="0" marL="0">
+              <a:buNone/>
+            </a:pPr>
+            <a:r>
+              <a:rPr lang="en-US" sz="1100" dirty="0">
+                <a:solidFill>
+                  <a:srgbClr val="075985"/>
+                </a:solidFill>
+                <a:latin typeface="Calibri" pitchFamily="34" charset="0"/>
+                <a:ea typeface="Calibri" pitchFamily="34" charset="-122"/>
+                <a:cs typeface="Calibri" pitchFamily="34" charset="-120"/>
+              </a:rPr>
+              <a:t> · the portable cartridge</a:t>
+            </a:r>
+            <a:endParaRPr lang="en-US" sz="1100" dirty="0"/>
+          </a:p>
+        </p:txBody>
+      </p:sp>
+      <p:sp>
+        <p:nvSpPr>
           <p:cNvPr id="25" name="Slide Number Placeholder 0"/>
           <p:cNvSpPr>
             <a:spLocks noGrp="1"/>
@@ -15745,6 +17822,133 @@
               <a:t>Your whole game, for two machines: 16 kilobytes</a:t>
             </a:r>
             <a:endParaRPr lang="en-US" sz="1300" dirty="0"/>
+          </a:p>
+        </p:txBody>
+      </p:sp>
+      <p:sp>
+        <p:nvSpPr>
+          <p:cNvPr id="17" name="Shape 15"/>
+          <p:cNvSpPr/>
+          <p:nvPr/>
+        </p:nvSpPr>
+        <p:spPr>
+          <a:xfrm>
+            <a:off x="8090738" y="91440"/>
+            <a:ext cx="3552317" cy="274320"/>
+          </a:xfrm>
+          <a:prstGeom prst="rect">
+            <a:avLst/>
+          </a:prstGeom>
+          <a:solidFill>
+            <a:srgbClr val="E0F2FE"/>
+          </a:solidFill>
+          <a:ln w="12700">
+            <a:solidFill>
+              <a:srgbClr val="0369A1"/>
+            </a:solidFill>
+            <a:prstDash val="solid"/>
+          </a:ln>
+        </p:spPr>
+      </p:sp>
+      <p:sp>
+        <p:nvSpPr>
+          <p:cNvPr id="18" name="Shape 16"/>
+          <p:cNvSpPr/>
+          <p:nvPr/>
+        </p:nvSpPr>
+        <p:spPr>
+          <a:xfrm>
+            <a:off x="8090738" y="91440"/>
+            <a:ext cx="73152" cy="274320"/>
+          </a:xfrm>
+          <a:prstGeom prst="rect">
+            <a:avLst/>
+          </a:prstGeom>
+          <a:solidFill>
+            <a:srgbClr val="0369A1"/>
+          </a:solidFill>
+          <a:ln w="12700">
+            <a:solidFill>
+              <a:srgbClr val="0369A1"/>
+            </a:solidFill>
+            <a:prstDash val="solid"/>
+          </a:ln>
+        </p:spPr>
+      </p:sp>
+      <p:pic>
+        <p:nvPicPr>
+          <p:cNvPr id="19" name="Image 0" descr="preencoded.png">    </p:cNvPr>
+          <p:cNvPicPr>
+            <a:picLocks noChangeAspect="1"/>
+          </p:cNvPicPr>
+          <p:nvPr/>
+        </p:nvPicPr>
+        <p:blipFill>
+          <a:blip r:embed="rId1"/>
+          <a:stretch>
+            <a:fillRect/>
+          </a:stretch>
+        </p:blipFill>
+        <p:spPr>
+          <a:xfrm>
+            <a:off x="8218754" y="128016"/>
+            <a:ext cx="201168" cy="201168"/>
+          </a:xfrm>
+          <a:prstGeom prst="rect">
+            <a:avLst/>
+          </a:prstGeom>
+        </p:spPr>
+      </p:pic>
+      <p:sp>
+        <p:nvSpPr>
+          <p:cNvPr id="20" name="Text 17"/>
+          <p:cNvSpPr txBox="1"/>
+          <p:nvPr/>
+        </p:nvSpPr>
+        <p:spPr>
+          <a:xfrm>
+            <a:off x="8474786" y="91440"/>
+            <a:ext cx="3131693" cy="274320"/>
+          </a:xfrm>
+          <a:prstGeom prst="rect">
+            <a:avLst/>
+          </a:prstGeom>
+          <a:noFill/>
+          <a:ln/>
+        </p:spPr>
+        <p:txBody>
+          <a:bodyPr wrap="square" lIns="0" tIns="0" rIns="0" bIns="0" rtlCol="0" anchor="ctr"/>
+          <a:lstStyle/>
+          <a:p>
+            <a:pPr indent="0" marL="0">
+              <a:buNone/>
+            </a:pPr>
+            <a:r>
+              <a:rPr lang="en-US" sz="1100" b="1" dirty="0">
+                <a:solidFill>
+                  <a:srgbClr val="075985"/>
+                </a:solidFill>
+                <a:latin typeface="Calibri" pitchFamily="34" charset="0"/>
+                <a:ea typeface="Calibri" pitchFamily="34" charset="-122"/>
+                <a:cs typeface="Calibri" pitchFamily="34" charset="-120"/>
+              </a:rPr>
+              <a:t>UNDERSTAND NOW</a:t>
+            </a:r>
+            <a:pPr indent="0" marL="0">
+              <a:buNone/>
+            </a:pPr>
+            <a:r>
+              <a:rPr lang="en-US" sz="1100" dirty="0">
+                <a:solidFill>
+                  <a:srgbClr val="075985"/>
+                </a:solidFill>
+                <a:latin typeface="Calibri" pitchFamily="34" charset="0"/>
+                <a:ea typeface="Calibri" pitchFamily="34" charset="-122"/>
+                <a:cs typeface="Calibri" pitchFamily="34" charset="-120"/>
+              </a:rPr>
+              <a:t> · packaging and publishing</a:t>
+            </a:r>
+            <a:endParaRPr lang="en-US" sz="1100" dirty="0"/>
           </a:p>
         </p:txBody>
       </p:sp>

--- a/en/slides/23-Computer_Architecture-Verm1_On_The_Cartridge_Store-Code.pptx
+++ b/en/slides/23-Computer_Architecture-Verm1_On_The_Cartridge_Store-Code.pptx
@@ -123,42 +123,42 @@
   <p:extLst>
     <p:ext uri="{521415D9-36F7-43E2-AB2F-B90AF26B5E84}">
       <p14:sectionLst xmlns:p14="http://schemas.microsoft.com/office/powerpoint/2010/main">
-        <p14:section name="Opening" id="{aa134596-b1e8-24cb-f5f7-5ba4268f422e}">
+        <p14:section name="Opening" id="{f66a5dde-fbc3-71fc-75a4-ea8c456f8fd1}">
           <p14:sldIdLst>
             <p14:sldId id="256"/>
             <p14:sldId id="257"/>
           </p14:sldIdLst>
         </p14:section>
-        <p14:section name="Step 1: one source, two cartridges" id="{7f709195-6d8b-983f-b7ec-ed31fc7207ff}">
+        <p14:section name="Step 1: one source, two cartridges" id="{065077be-ed22-69ea-1db2-278a96105057}">
           <p14:sldIdLst>
             <p14:sldId id="258"/>
             <p14:sldId id="259"/>
           </p14:sldIdLst>
         </p14:section>
-        <p14:section name="Step 2: an identity" id="{13a2b3d3-2b99-a3a7-1d00-eadc68d7fd1e}">
+        <p14:section name="Step 2: an identity" id="{dd4f28dc-4ee5-bb6e-75c3-6837198ecb64}">
           <p14:sldIdLst>
             <p14:sldId id="260"/>
             <p14:sldId id="261"/>
           </p14:sldIdLst>
         </p14:section>
-        <p14:section name="Step 3: the cartridge carries its papers" id="{11de7cff-d375-d6d4-099d-027aeb44401f}">
+        <p14:section name="Step 3: the cartridge carries its papers" id="{65c50a80-27ad-93e1-3867-ef40c411dca2}">
           <p14:sldIdLst>
             <p14:sldId id="262"/>
             <p14:sldId id="263"/>
           </p14:sldIdLst>
         </p14:section>
-        <p14:section name="Step 4: the bundle" id="{e6a81386-a3af-ca83-9f83-a3d8dc44b08f}">
+        <p14:section name="Step 4: the bundle" id="{785597d3-eaa1-4e5f-4c96-fc27e3c31c6f}">
           <p14:sldIdLst>
             <p14:sldId id="264"/>
             <p14:sldId id="265"/>
           </p14:sldIdLst>
         </p14:section>
-        <p14:section name="Step 5: publication" id="{fd2ad682-e3ab-6839-0839-db7b1562c0dc}">
+        <p14:section name="Step 5: publication" id="{ce8a00d8-7199-1d71-e3b9-467db32c556f}">
           <p14:sldIdLst>
             <p14:sldId id="266"/>
           </p14:sldIdLst>
         </p14:section>
-        <p14:section name="Run it and test it" id="{790b593c-3b28-b817-b6ce-5f2a8b46b66a}">
+        <p14:section name="Run it and test it" id="{364907f8-8fee-aee9-5873-bf11846a131d}">
           <p14:sldIdLst>
             <p14:sldId id="267"/>
             <p14:sldId id="268"/>
@@ -167,7 +167,7 @@
             <p14:sldId id="271"/>
           </p14:sldIdLst>
         </p14:section>
-        <p14:section name="Exercises" id="{a7c3d9cf-4114-47f5-5e3a-658599f6f4e3}">
+        <p14:section name="Exercises" id="{fa500200-7536-028c-03a0-f5aecca4a470}">
           <p14:sldIdLst>
             <p14:sldId id="272"/>
           </p14:sldIdLst>
